--- a/SruthiScribe-pitch.pptx
+++ b/SruthiScribe-pitch.pptx
@@ -3274,23 +3274,39 @@
         </p:nvSpPr>
         <p:spPr>
           <a:xfrm>
-            <a:off x="1005840" y="5760720"/>
-            <a:ext cx="10058400" cy="457200"/>
-          </a:xfrm>
-          <a:prstGeom prst="rect">
-            <a:avLst/>
-          </a:prstGeom>
-          <a:noFill/>
-        </p:spPr>
-        <p:txBody>
-          <a:bodyPr wrap="square" anchor="t" lIns="0" rIns="0" tIns="0" bIns="0">
-            <a:spAutoFit/>
-          </a:bodyPr>
-          <a:lstStyle/>
-          <a:p>
-            <a:pPr algn="l">
-              <a:lnSpc>
-                <a:spcPct val="100000"/>
+            <a:off x="1005840" y="5504688"/>
+            <a:ext cx="10058400" cy="868680"/>
+          </a:xfrm>
+          <a:prstGeom prst="rect">
+            <a:avLst/>
+          </a:prstGeom>
+          <a:noFill/>
+        </p:spPr>
+        <p:txBody>
+          <a:bodyPr wrap="square" anchor="t" lIns="0" rIns="0" tIns="0" bIns="0">
+            <a:spAutoFit/>
+          </a:bodyPr>
+          <a:lstStyle/>
+          <a:p>
+            <a:pPr algn="l">
+              <a:lnSpc>
+                <a:spcPct val="150000"/>
+              </a:lnSpc>
+            </a:pPr>
+            <a:r>
+              <a:rPr sz="1250" b="0">
+                <a:solidFill>
+                  <a:srgbClr val="8A6D2F"/>
+                </a:solidFill>
+                <a:latin typeface="Menlo"/>
+              </a:rPr>
+              <a:t>Vinoth Kannan  ·  vinoth.kannan.eu(at)gmail.com</a:t>
+            </a:r>
+          </a:p>
+          <a:p>
+            <a:pPr algn="l">
+              <a:lnSpc>
+                <a:spcPct val="150000"/>
               </a:lnSpc>
             </a:pPr>
             <a:r>
@@ -3433,7 +3449,7 @@
           <a:p>
             <a:pPr algn="l">
               <a:lnSpc>
-                <a:spcPct val="160000"/>
+                <a:spcPct val="125000"/>
               </a:lnSpc>
             </a:pPr>
             <a:r>
@@ -3443,55 +3459,142 @@
                 </a:solidFill>
                 <a:latin typeface="Helvetica Neue"/>
               </a:rPr>
-              <a:t>Raise the SSP yield — every point converts directly into complete works.</a:t>
-            </a:r>
-          </a:p>
-          <a:p>
-            <a:pPr algn="l">
-              <a:lnSpc>
-                <a:spcPct val="160000"/>
+              <a:t>·  Raise the SSP yield — every point converts directly into complete works.</a:t>
+            </a:r>
+          </a:p>
+          <a:p>
+            <a:pPr algn="l">
+              <a:lnSpc>
+                <a:spcPct val="125000"/>
               </a:lnSpc>
             </a:pPr>
             <a:r>
               <a:rPr sz="1500" b="0">
                 <a:solidFill>
+                  <a:srgbClr val="756D5E"/>
+                </a:solidFill>
+                <a:latin typeface="Helvetica Neue"/>
+              </a:rPr>
+              <a:t/>
+            </a:r>
+          </a:p>
+          <a:p>
+            <a:pPr algn="l">
+              <a:lnSpc>
+                <a:spcPct val="125000"/>
+              </a:lnSpc>
+            </a:pPr>
+            <a:r>
+              <a:rPr sz="1500" b="0">
+                <a:solidFill>
                   <a:srgbClr val="453F36"/>
                 </a:solidFill>
                 <a:latin typeface="Helvetica Neue"/>
               </a:rPr>
-              <a:t>Cut the voicing false alarm; it is the weakest measured number.</a:t>
-            </a:r>
-          </a:p>
-          <a:p>
-            <a:pPr algn="l">
-              <a:lnSpc>
-                <a:spcPct val="160000"/>
+              <a:t>·  Cut the voicing false alarm; it is the weakest measured number.</a:t>
+            </a:r>
+          </a:p>
+          <a:p>
+            <a:pPr algn="l">
+              <a:lnSpc>
+                <a:spcPct val="125000"/>
               </a:lnSpc>
             </a:pPr>
             <a:r>
               <a:rPr sz="1500" b="0">
                 <a:solidFill>
+                  <a:srgbClr val="756D5E"/>
+                </a:solidFill>
+                <a:latin typeface="Helvetica Neue"/>
+              </a:rPr>
+              <a:t/>
+            </a:r>
+          </a:p>
+          <a:p>
+            <a:pPr algn="l">
+              <a:lnSpc>
+                <a:spcPct val="125000"/>
+              </a:lnSpc>
+            </a:pPr>
+            <a:r>
+              <a:rPr sz="1500" b="0">
+                <a:solidFill>
                   <a:srgbClr val="453F36"/>
                 </a:solidFill>
                 <a:latin typeface="Helvetica Neue"/>
               </a:rPr>
-              <a:t>Phrase-level ragam identification, where the published work actually lives.</a:t>
-            </a:r>
-          </a:p>
-          <a:p>
-            <a:pPr algn="l">
-              <a:lnSpc>
-                <a:spcPct val="160000"/>
+              <a:t>·  Phrase-level ragam identification, where the published work actually lives.</a:t>
+            </a:r>
+          </a:p>
+          <a:p>
+            <a:pPr algn="l">
+              <a:lnSpc>
+                <a:spcPct val="125000"/>
               </a:lnSpc>
             </a:pPr>
             <a:r>
               <a:rPr sz="1500" b="0">
                 <a:solidFill>
+                  <a:srgbClr val="756D5E"/>
+                </a:solidFill>
+                <a:latin typeface="Helvetica Neue"/>
+              </a:rPr>
+              <a:t/>
+            </a:r>
+          </a:p>
+          <a:p>
+            <a:pPr algn="l">
+              <a:lnSpc>
+                <a:spcPct val="125000"/>
+              </a:lnSpc>
+            </a:pPr>
+            <a:r>
+              <a:rPr sz="1500" b="0">
+                <a:solidFill>
                   <a:srgbClr val="453F36"/>
                 </a:solidFill>
                 <a:latin typeface="Helvetica Neue"/>
               </a:rPr>
-              <a:t>Attach openly-licensed audio to notated works, so a student can hear and read together.</a:t>
+              <a:t>·  Attach openly-licensed audio to notated works, so a student can hear and read together.</a:t>
+            </a:r>
+          </a:p>
+        </p:txBody>
+      </p:sp>
+      <p:sp>
+        <p:nvSpPr>
+          <p:cNvPr id="5" name="TextBox 4"/>
+          <p:cNvSpPr txBox="1"/>
+          <p:nvPr/>
+        </p:nvSpPr>
+        <p:spPr>
+          <a:xfrm>
+            <a:off x="1005840" y="6382512"/>
+            <a:ext cx="10058400" cy="384048"/>
+          </a:xfrm>
+          <a:prstGeom prst="rect">
+            <a:avLst/>
+          </a:prstGeom>
+          <a:noFill/>
+        </p:spPr>
+        <p:txBody>
+          <a:bodyPr wrap="square" anchor="t" lIns="0" rIns="0" tIns="0" bIns="0">
+            <a:spAutoFit/>
+          </a:bodyPr>
+          <a:lstStyle/>
+          <a:p>
+            <a:pPr algn="l">
+              <a:lnSpc>
+                <a:spcPct val="100000"/>
+              </a:lnSpc>
+            </a:pPr>
+            <a:r>
+              <a:rPr sz="1250" b="0">
+                <a:solidFill>
+                  <a:srgbClr val="756D5E"/>
+                </a:solidFill>
+                <a:latin typeface="Menlo"/>
+              </a:rPr>
+              <a:t>Questions, corrections, missing compositions — Vinoth Kannan, vinoth.kannan.eu(at)gmail.com</a:t>
             </a:r>
           </a:p>
         </p:txBody>
@@ -3628,7 +3731,7 @@
               </a:lnSpc>
             </a:pPr>
             <a:r>
-              <a:rPr sz="1500" b="1">
+              <a:rPr sz="1550" b="1">
                 <a:solidFill>
                   <a:srgbClr val="1C1915"/>
                 </a:solidFill>
@@ -3647,7 +3750,46 @@
         </p:nvSpPr>
         <p:spPr>
           <a:xfrm>
-            <a:off x="822960" y="2020824"/>
+            <a:off x="822960" y="2057400"/>
+            <a:ext cx="5120640" cy="731520"/>
+          </a:xfrm>
+          <a:prstGeom prst="rect">
+            <a:avLst/>
+          </a:prstGeom>
+          <a:noFill/>
+        </p:spPr>
+        <p:txBody>
+          <a:bodyPr wrap="square" anchor="t" lIns="0" rIns="0" tIns="0" bIns="0">
+            <a:spAutoFit/>
+          </a:bodyPr>
+          <a:lstStyle/>
+          <a:p>
+            <a:pPr algn="l">
+              <a:lnSpc>
+                <a:spcPct val="125000"/>
+              </a:lnSpc>
+            </a:pPr>
+            <a:r>
+              <a:rPr sz="1300" b="0">
+                <a:solidFill>
+                  <a:srgbClr val="756D5E"/>
+                </a:solidFill>
+                <a:latin typeface="Helvetica Neue"/>
+              </a:rPr>
+              <a:t>Correction happens in the lesson, from the teacher's ear. Between lessons there is no feedback at all.</a:t>
+            </a:r>
+          </a:p>
+        </p:txBody>
+      </p:sp>
+      <p:sp>
+        <p:nvSpPr>
+          <p:cNvPr id="6" name="TextBox 5"/>
+          <p:cNvSpPr txBox="1"/>
+          <p:nvPr/>
+        </p:nvSpPr>
+        <p:spPr>
+          <a:xfrm>
+            <a:off x="822960" y="2752344"/>
             <a:ext cx="5120640" cy="365760"/>
           </a:xfrm>
           <a:prstGeom prst="rect">
@@ -3667,26 +3809,65 @@
               </a:lnSpc>
             </a:pPr>
             <a:r>
-              <a:rPr sz="1250" b="0">
+              <a:rPr sz="1550" b="1">
+                <a:solidFill>
+                  <a:srgbClr val="1C1915"/>
+                </a:solidFill>
+                <a:latin typeface="Helvetica Neue"/>
+              </a:rPr>
+              <a:t>Notation exists, but not where you need it</a:t>
+            </a:r>
+          </a:p>
+        </p:txBody>
+      </p:sp>
+      <p:sp>
+        <p:nvSpPr>
+          <p:cNvPr id="7" name="TextBox 6"/>
+          <p:cNvSpPr txBox="1"/>
+          <p:nvPr/>
+        </p:nvSpPr>
+        <p:spPr>
+          <a:xfrm>
+            <a:off x="822960" y="3026664"/>
+            <a:ext cx="5120640" cy="731520"/>
+          </a:xfrm>
+          <a:prstGeom prst="rect">
+            <a:avLst/>
+          </a:prstGeom>
+          <a:noFill/>
+        </p:spPr>
+        <p:txBody>
+          <a:bodyPr wrap="square" anchor="t" lIns="0" rIns="0" tIns="0" bIns="0">
+            <a:spAutoFit/>
+          </a:bodyPr>
+          <a:lstStyle/>
+          <a:p>
+            <a:pPr algn="l">
+              <a:lnSpc>
+                <a:spcPct val="125000"/>
+              </a:lnSpc>
+            </a:pPr>
+            <a:r>
+              <a:rPr sz="1300" b="0">
                 <a:solidFill>
                   <a:srgbClr val="756D5E"/>
                 </a:solidFill>
                 <a:latin typeface="Helvetica Neue"/>
               </a:rPr>
-              <a:t>Correction happens in the lesson, from the teacher's ear. Between lessons there is no feedback at all.</a:t>
-            </a:r>
-          </a:p>
-        </p:txBody>
-      </p:sp>
-      <p:sp>
-        <p:nvSpPr>
-          <p:cNvPr id="6" name="TextBox 5"/>
-          <p:cNvSpPr txBox="1"/>
-          <p:nvPr/>
-        </p:nvSpPr>
-        <p:spPr>
-          <a:xfrm>
-            <a:off x="822960" y="2624328"/>
+              <a:t>Printed books, PDFs and scanned archives — none of it queryable, none of it aligned to what you are singing.</a:t>
+            </a:r>
+          </a:p>
+        </p:txBody>
+      </p:sp>
+      <p:sp>
+        <p:nvSpPr>
+          <p:cNvPr id="8" name="TextBox 7"/>
+          <p:cNvSpPr txBox="1"/>
+          <p:nvPr/>
+        </p:nvSpPr>
+        <p:spPr>
+          <a:xfrm>
+            <a:off x="822960" y="3721608"/>
             <a:ext cx="5120640" cy="365760"/>
           </a:xfrm>
           <a:prstGeom prst="rect">
@@ -3706,90 +3887,12 @@
               </a:lnSpc>
             </a:pPr>
             <a:r>
-              <a:rPr sz="1500" b="1">
+              <a:rPr sz="1550" b="1">
                 <a:solidFill>
                   <a:srgbClr val="1C1915"/>
                 </a:solidFill>
                 <a:latin typeface="Helvetica Neue"/>
               </a:rPr>
-              <a:t>Notation exists, but not where you need it</a:t>
-            </a:r>
-          </a:p>
-        </p:txBody>
-      </p:sp>
-      <p:sp>
-        <p:nvSpPr>
-          <p:cNvPr id="7" name="TextBox 6"/>
-          <p:cNvSpPr txBox="1"/>
-          <p:nvPr/>
-        </p:nvSpPr>
-        <p:spPr>
-          <a:xfrm>
-            <a:off x="822960" y="2862072"/>
-            <a:ext cx="5120640" cy="365760"/>
-          </a:xfrm>
-          <a:prstGeom prst="rect">
-            <a:avLst/>
-          </a:prstGeom>
-          <a:noFill/>
-        </p:spPr>
-        <p:txBody>
-          <a:bodyPr wrap="square" anchor="t" lIns="0" rIns="0" tIns="0" bIns="0">
-            <a:spAutoFit/>
-          </a:bodyPr>
-          <a:lstStyle/>
-          <a:p>
-            <a:pPr algn="l">
-              <a:lnSpc>
-                <a:spcPct val="100000"/>
-              </a:lnSpc>
-            </a:pPr>
-            <a:r>
-              <a:rPr sz="1250" b="0">
-                <a:solidFill>
-                  <a:srgbClr val="756D5E"/>
-                </a:solidFill>
-                <a:latin typeface="Helvetica Neue"/>
-              </a:rPr>
-              <a:t>Printed books, PDFs and scanned archives — none of it queryable, none of it aligned to what you are singing.</a:t>
-            </a:r>
-          </a:p>
-        </p:txBody>
-      </p:sp>
-      <p:sp>
-        <p:nvSpPr>
-          <p:cNvPr id="8" name="TextBox 7"/>
-          <p:cNvSpPr txBox="1"/>
-          <p:nvPr/>
-        </p:nvSpPr>
-        <p:spPr>
-          <a:xfrm>
-            <a:off x="822960" y="3465576"/>
-            <a:ext cx="5120640" cy="365760"/>
-          </a:xfrm>
-          <a:prstGeom prst="rect">
-            <a:avLst/>
-          </a:prstGeom>
-          <a:noFill/>
-        </p:spPr>
-        <p:txBody>
-          <a:bodyPr wrap="square" anchor="t" lIns="0" rIns="0" tIns="0" bIns="0">
-            <a:spAutoFit/>
-          </a:bodyPr>
-          <a:lstStyle/>
-          <a:p>
-            <a:pPr algn="l">
-              <a:lnSpc>
-                <a:spcPct val="100000"/>
-              </a:lnSpc>
-            </a:pPr>
-            <a:r>
-              <a:rPr sz="1500" b="1">
-                <a:solidFill>
-                  <a:srgbClr val="1C1915"/>
-                </a:solidFill>
-                <a:latin typeface="Helvetica Neue"/>
-              </a:rPr>
               <a:t>The reference corpus is scattered and closed</a:t>
             </a:r>
           </a:p>
@@ -3803,27 +3906,27 @@
         </p:nvSpPr>
         <p:spPr>
           <a:xfrm>
-            <a:off x="822960" y="3703320"/>
-            <a:ext cx="5120640" cy="365760"/>
-          </a:xfrm>
-          <a:prstGeom prst="rect">
-            <a:avLst/>
-          </a:prstGeom>
-          <a:noFill/>
-        </p:spPr>
-        <p:txBody>
-          <a:bodyPr wrap="square" anchor="t" lIns="0" rIns="0" tIns="0" bIns="0">
-            <a:spAutoFit/>
-          </a:bodyPr>
-          <a:lstStyle/>
-          <a:p>
-            <a:pPr algn="l">
-              <a:lnSpc>
-                <a:spcPct val="100000"/>
-              </a:lnSpc>
-            </a:pPr>
-            <a:r>
-              <a:rPr sz="1250" b="0">
+            <a:off x="822960" y="3995928"/>
+            <a:ext cx="5120640" cy="731520"/>
+          </a:xfrm>
+          <a:prstGeom prst="rect">
+            <a:avLst/>
+          </a:prstGeom>
+          <a:noFill/>
+        </p:spPr>
+        <p:txBody>
+          <a:bodyPr wrap="square" anchor="t" lIns="0" rIns="0" tIns="0" bIns="0">
+            <a:spAutoFit/>
+          </a:bodyPr>
+          <a:lstStyle/>
+          <a:p>
+            <a:pPr algn="l">
+              <a:lnSpc>
+                <a:spcPct val="125000"/>
+              </a:lnSpc>
+            </a:pPr>
+            <a:r>
+              <a:rPr sz="1300" b="0">
                 <a:solidFill>
                   <a:srgbClr val="756D5E"/>
                 </a:solidFill>
@@ -4146,7 +4249,7 @@
         <p:spPr>
           <a:xfrm>
             <a:off x="822960" y="1737360"/>
-            <a:ext cx="5120640" cy="3291840"/>
+            <a:ext cx="5120640" cy="2377440"/>
           </a:xfrm>
           <a:prstGeom prst="roundRect">
             <a:avLst>
@@ -4297,7 +4400,7 @@
         <p:spPr>
           <a:xfrm>
             <a:off x="6309360" y="1737360"/>
-            <a:ext cx="5029200" cy="3291840"/>
+            <a:ext cx="5029200" cy="2377440"/>
           </a:xfrm>
           <a:prstGeom prst="roundRect">
             <a:avLst>
@@ -4447,7 +4550,7 @@
         </p:nvSpPr>
         <p:spPr>
           <a:xfrm>
-            <a:off x="822960" y="5257800"/>
+            <a:off x="822960" y="4434840"/>
             <a:ext cx="10515600" cy="548640"/>
           </a:xfrm>
           <a:prstGeom prst="rect">
@@ -4590,7 +4693,7 @@
         </p:nvSpPr>
         <p:spPr>
           <a:xfrm>
-            <a:off x="822960" y="1737360"/>
+            <a:off x="822960" y="1874519"/>
             <a:ext cx="5029200" cy="365760"/>
           </a:xfrm>
           <a:prstGeom prst="rect">
@@ -4610,7 +4713,7 @@
               </a:lnSpc>
             </a:pPr>
             <a:r>
-              <a:rPr sz="1500" b="1">
+              <a:rPr sz="1550" b="1">
                 <a:solidFill>
                   <a:srgbClr val="1C1915"/>
                 </a:solidFill>
@@ -4629,7 +4732,46 @@
         </p:nvSpPr>
         <p:spPr>
           <a:xfrm>
-            <a:off x="822960" y="1975104"/>
+            <a:off x="822960" y="2148839"/>
+            <a:ext cx="5029200" cy="731520"/>
+          </a:xfrm>
+          <a:prstGeom prst="rect">
+            <a:avLst/>
+          </a:prstGeom>
+          <a:noFill/>
+        </p:spPr>
+        <p:txBody>
+          <a:bodyPr wrap="square" anchor="t" lIns="0" rIns="0" tIns="0" bIns="0">
+            <a:spAutoFit/>
+          </a:bodyPr>
+          <a:lstStyle/>
+          <a:p>
+            <a:pPr algn="l">
+              <a:lnSpc>
+                <a:spcPct val="125000"/>
+              </a:lnSpc>
+            </a:pPr>
+            <a:r>
+              <a:rPr sz="1300" b="0">
+                <a:solidFill>
+                  <a:srgbClr val="756D5E"/>
+                </a:solidFill>
+                <a:latin typeface="Helvetica Neue"/>
+              </a:rPr>
+              <a:t>Microphone or file, in the browser. Svaras with octave, duration, gamaka class and cents deviation.</a:t>
+            </a:r>
+          </a:p>
+        </p:txBody>
+      </p:sp>
+      <p:sp>
+        <p:nvSpPr>
+          <p:cNvPr id="6" name="TextBox 5"/>
+          <p:cNvSpPr txBox="1"/>
+          <p:nvPr/>
+        </p:nvSpPr>
+        <p:spPr>
+          <a:xfrm>
+            <a:off x="822960" y="2843783"/>
             <a:ext cx="5029200" cy="365760"/>
           </a:xfrm>
           <a:prstGeom prst="rect">
@@ -4649,26 +4791,65 @@
               </a:lnSpc>
             </a:pPr>
             <a:r>
-              <a:rPr sz="1250" b="0">
+              <a:rPr sz="1550" b="1">
+                <a:solidFill>
+                  <a:srgbClr val="1C1915"/>
+                </a:solidFill>
+                <a:latin typeface="Helvetica Neue"/>
+              </a:rPr>
+              <a:t>Tala-aware layout</a:t>
+            </a:r>
+          </a:p>
+        </p:txBody>
+      </p:sp>
+      <p:sp>
+        <p:nvSpPr>
+          <p:cNvPr id="7" name="TextBox 6"/>
+          <p:cNvSpPr txBox="1"/>
+          <p:nvPr/>
+        </p:nvSpPr>
+        <p:spPr>
+          <a:xfrm>
+            <a:off x="822960" y="3118103"/>
+            <a:ext cx="5029200" cy="731520"/>
+          </a:xfrm>
+          <a:prstGeom prst="rect">
+            <a:avLst/>
+          </a:prstGeom>
+          <a:noFill/>
+        </p:spPr>
+        <p:txBody>
+          <a:bodyPr wrap="square" anchor="t" lIns="0" rIns="0" tIns="0" bIns="0">
+            <a:spAutoFit/>
+          </a:bodyPr>
+          <a:lstStyle/>
+          <a:p>
+            <a:pPr algn="l">
+              <a:lnSpc>
+                <a:spcPct val="125000"/>
+              </a:lnSpc>
+            </a:pPr>
+            <a:r>
+              <a:rPr sz="1300" b="0">
                 <a:solidFill>
                   <a:srgbClr val="756D5E"/>
                 </a:solidFill>
                 <a:latin typeface="Helvetica Neue"/>
               </a:rPr>
-              <a:t>Microphone or file, in the browser. Svaras with octave, duration, gamaka class and cents deviation.</a:t>
-            </a:r>
-          </a:p>
-        </p:txBody>
-      </p:sp>
-      <p:sp>
-        <p:nvSpPr>
-          <p:cNvPr id="6" name="TextBox 5"/>
-          <p:cNvSpPr txBox="1"/>
-          <p:nvPr/>
-        </p:nvSpPr>
-        <p:spPr>
-          <a:xfrm>
-            <a:off x="822960" y="2542032"/>
+              <a:t>All seven suladi sapta talas × five jatis, nadai 1x–8x, avartana and anga bar lines, sahitya under the svaras.</a:t>
+            </a:r>
+          </a:p>
+        </p:txBody>
+      </p:sp>
+      <p:sp>
+        <p:nvSpPr>
+          <p:cNvPr id="8" name="TextBox 7"/>
+          <p:cNvSpPr txBox="1"/>
+          <p:nvPr/>
+        </p:nvSpPr>
+        <p:spPr>
+          <a:xfrm>
+            <a:off x="822960" y="3813047"/>
             <a:ext cx="5029200" cy="365760"/>
           </a:xfrm>
           <a:prstGeom prst="rect">
@@ -4688,26 +4869,65 @@
               </a:lnSpc>
             </a:pPr>
             <a:r>
-              <a:rPr sz="1500" b="1">
+              <a:rPr sz="1550" b="1">
                 <a:solidFill>
                   <a:srgbClr val="1C1915"/>
                 </a:solidFill>
                 <a:latin typeface="Helvetica Neue"/>
               </a:rPr>
-              <a:t>Tala-aware layout</a:t>
-            </a:r>
-          </a:p>
-        </p:txBody>
-      </p:sp>
-      <p:sp>
-        <p:nvSpPr>
-          <p:cNvPr id="7" name="TextBox 6"/>
-          <p:cNvSpPr txBox="1"/>
-          <p:nvPr/>
-        </p:nvSpPr>
-        <p:spPr>
-          <a:xfrm>
-            <a:off x="822960" y="2779776"/>
+              <a:t>Fix what it got wrong</a:t>
+            </a:r>
+          </a:p>
+        </p:txBody>
+      </p:sp>
+      <p:sp>
+        <p:nvSpPr>
+          <p:cNvPr id="9" name="TextBox 8"/>
+          <p:cNvSpPr txBox="1"/>
+          <p:nvPr/>
+        </p:nvSpPr>
+        <p:spPr>
+          <a:xfrm>
+            <a:off x="822960" y="4087367"/>
+            <a:ext cx="5029200" cy="731520"/>
+          </a:xfrm>
+          <a:prstGeom prst="rect">
+            <a:avLst/>
+          </a:prstGeom>
+          <a:noFill/>
+        </p:spPr>
+        <p:txBody>
+          <a:bodyPr wrap="square" anchor="t" lIns="0" rIns="0" tIns="0" bIns="0">
+            <a:spAutoFit/>
+          </a:bodyPr>
+          <a:lstStyle/>
+          <a:p>
+            <a:pPr algn="l">
+              <a:lnSpc>
+                <a:spcPct val="125000"/>
+              </a:lnSpc>
+            </a:pPr>
+            <a:r>
+              <a:rPr sz="1300" b="0">
+                <a:solidFill>
+                  <a:srgbClr val="756D5E"/>
+                </a:solidFill>
+                <a:latin typeface="Helvetica Neue"/>
+              </a:rPr>
+              <a:t>Edit any svara, mark the eduppu, regroup speeds — the decode is a starting point, not a verdict.</a:t>
+            </a:r>
+          </a:p>
+        </p:txBody>
+      </p:sp>
+      <p:sp>
+        <p:nvSpPr>
+          <p:cNvPr id="10" name="TextBox 9"/>
+          <p:cNvSpPr txBox="1"/>
+          <p:nvPr/>
+        </p:nvSpPr>
+        <p:spPr>
+          <a:xfrm>
+            <a:off x="822960" y="4782311"/>
             <a:ext cx="5029200" cy="365760"/>
           </a:xfrm>
           <a:prstGeom prst="rect">
@@ -4727,26 +4947,65 @@
               </a:lnSpc>
             </a:pPr>
             <a:r>
-              <a:rPr sz="1250" b="0">
+              <a:rPr sz="1550" b="1">
+                <a:solidFill>
+                  <a:srgbClr val="1C1915"/>
+                </a:solidFill>
+                <a:latin typeface="Helvetica Neue"/>
+              </a:rPr>
+              <a:t>Export</a:t>
+            </a:r>
+          </a:p>
+        </p:txBody>
+      </p:sp>
+      <p:sp>
+        <p:nvSpPr>
+          <p:cNvPr id="11" name="TextBox 10"/>
+          <p:cNvSpPr txBox="1"/>
+          <p:nvPr/>
+        </p:nvSpPr>
+        <p:spPr>
+          <a:xfrm>
+            <a:off x="822960" y="5056631"/>
+            <a:ext cx="5029200" cy="731520"/>
+          </a:xfrm>
+          <a:prstGeom prst="rect">
+            <a:avLst/>
+          </a:prstGeom>
+          <a:noFill/>
+        </p:spPr>
+        <p:txBody>
+          <a:bodyPr wrap="square" anchor="t" lIns="0" rIns="0" tIns="0" bIns="0">
+            <a:spAutoFit/>
+          </a:bodyPr>
+          <a:lstStyle/>
+          <a:p>
+            <a:pPr algn="l">
+              <a:lnSpc>
+                <a:spcPct val="125000"/>
+              </a:lnSpc>
+            </a:pPr>
+            <a:r>
+              <a:rPr sz="1300" b="0">
                 <a:solidFill>
                   <a:srgbClr val="756D5E"/>
                 </a:solidFill>
                 <a:latin typeface="Helvetica Neue"/>
               </a:rPr>
-              <a:t>All seven suladi sapta talas × five jatis, nadai 1x–8x, avartana and anga bar lines, sahitya under the svaras.</a:t>
-            </a:r>
-          </a:p>
-        </p:txBody>
-      </p:sp>
-      <p:sp>
-        <p:nvSpPr>
-          <p:cNvPr id="8" name="TextBox 7"/>
-          <p:cNvSpPr txBox="1"/>
-          <p:nvPr/>
-        </p:nvSpPr>
-        <p:spPr>
-          <a:xfrm>
-            <a:off x="822960" y="3346704"/>
+              <a:t>Print-quality PDF laid out as the tradition prints it, JSON, or contribute the reading to the library.</a:t>
+            </a:r>
+          </a:p>
+        </p:txBody>
+      </p:sp>
+      <p:sp>
+        <p:nvSpPr>
+          <p:cNvPr id="12" name="TextBox 11"/>
+          <p:cNvSpPr txBox="1"/>
+          <p:nvPr/>
+        </p:nvSpPr>
+        <p:spPr>
+          <a:xfrm>
+            <a:off x="6309360" y="1874519"/>
             <a:ext cx="5029200" cy="365760"/>
           </a:xfrm>
           <a:prstGeom prst="rect">
@@ -4766,26 +5025,65 @@
               </a:lnSpc>
             </a:pPr>
             <a:r>
-              <a:rPr sz="1500" b="1">
+              <a:rPr sz="1550" b="1">
                 <a:solidFill>
                   <a:srgbClr val="1C1915"/>
                 </a:solidFill>
                 <a:latin typeface="Helvetica Neue"/>
               </a:rPr>
-              <a:t>Fix what it got wrong</a:t>
-            </a:r>
-          </a:p>
-        </p:txBody>
-      </p:sp>
-      <p:sp>
-        <p:nvSpPr>
-          <p:cNvPr id="9" name="TextBox 8"/>
-          <p:cNvSpPr txBox="1"/>
-          <p:nvPr/>
-        </p:nvSpPr>
-        <p:spPr>
-          <a:xfrm>
-            <a:off x="822960" y="3584448"/>
+              <a:t>A library of 598 compositions</a:t>
+            </a:r>
+          </a:p>
+        </p:txBody>
+      </p:sp>
+      <p:sp>
+        <p:nvSpPr>
+          <p:cNvPr id="13" name="TextBox 12"/>
+          <p:cNvSpPr txBox="1"/>
+          <p:nvPr/>
+        </p:nvSpPr>
+        <p:spPr>
+          <a:xfrm>
+            <a:off x="6309360" y="2148839"/>
+            <a:ext cx="5029200" cy="731520"/>
+          </a:xfrm>
+          <a:prstGeom prst="rect">
+            <a:avLst/>
+          </a:prstGeom>
+          <a:noFill/>
+        </p:spPr>
+        <p:txBody>
+          <a:bodyPr wrap="square" anchor="t" lIns="0" rIns="0" tIns="0" bIns="0">
+            <a:spAutoFit/>
+          </a:bodyPr>
+          <a:lstStyle/>
+          <a:p>
+            <a:pPr algn="l">
+              <a:lnSpc>
+                <a:spcPct val="125000"/>
+              </a:lnSpc>
+            </a:pPr>
+            <a:r>
+              <a:rPr sz="1300" b="0">
+                <a:solidFill>
+                  <a:srgbClr val="756D5E"/>
+                </a:solidFill>
+                <a:latin typeface="Helvetica Neue"/>
+              </a:rPr>
+              <a:t>42 with complete notation, searchable by ragam, tala, composer, deity and how complete the notation is.</a:t>
+            </a:r>
+          </a:p>
+        </p:txBody>
+      </p:sp>
+      <p:sp>
+        <p:nvSpPr>
+          <p:cNvPr id="14" name="TextBox 13"/>
+          <p:cNvSpPr txBox="1"/>
+          <p:nvPr/>
+        </p:nvSpPr>
+        <p:spPr>
+          <a:xfrm>
+            <a:off x="6309360" y="2843783"/>
             <a:ext cx="5029200" cy="365760"/>
           </a:xfrm>
           <a:prstGeom prst="rect">
@@ -4805,26 +5103,65 @@
               </a:lnSpc>
             </a:pPr>
             <a:r>
-              <a:rPr sz="1250" b="0">
+              <a:rPr sz="1550" b="1">
+                <a:solidFill>
+                  <a:srgbClr val="1C1915"/>
+                </a:solidFill>
+                <a:latin typeface="Helvetica Neue"/>
+              </a:rPr>
+              <a:t>939 ragams</a:t>
+            </a:r>
+          </a:p>
+        </p:txBody>
+      </p:sp>
+      <p:sp>
+        <p:nvSpPr>
+          <p:cNvPr id="15" name="TextBox 14"/>
+          <p:cNvSpPr txBox="1"/>
+          <p:nvPr/>
+        </p:nvSpPr>
+        <p:spPr>
+          <a:xfrm>
+            <a:off x="6309360" y="3118103"/>
+            <a:ext cx="5029200" cy="731520"/>
+          </a:xfrm>
+          <a:prstGeom prst="rect">
+            <a:avLst/>
+          </a:prstGeom>
+          <a:noFill/>
+        </p:spPr>
+        <p:txBody>
+          <a:bodyPr wrap="square" anchor="t" lIns="0" rIns="0" tIns="0" bIns="0">
+            <a:spAutoFit/>
+          </a:bodyPr>
+          <a:lstStyle/>
+          <a:p>
+            <a:pPr algn="l">
+              <a:lnSpc>
+                <a:spcPct val="125000"/>
+              </a:lnSpc>
+            </a:pPr>
+            <a:r>
+              <a:rPr sz="1300" b="0">
                 <a:solidFill>
                   <a:srgbClr val="756D5E"/>
                 </a:solidFill>
                 <a:latin typeface="Helvetica Neue"/>
               </a:rPr>
-              <a:t>Edit any svara, mark the eduppu, regroup speeds — the decode is a starting point, not a verdict.</a:t>
-            </a:r>
-          </a:p>
-        </p:txBody>
-      </p:sp>
-      <p:sp>
-        <p:nvSpPr>
-          <p:cNvPr id="10" name="TextBox 9"/>
-          <p:cNvSpPr txBox="1"/>
-          <p:nvPr/>
-        </p:nvSpPr>
-        <p:spPr>
-          <a:xfrm>
-            <a:off x="822960" y="4151376"/>
+              <a:t>All 72 melakartas and their janyas, with arohana/avarohana; 114 wired into the decoder as constraints.</a:t>
+            </a:r>
+          </a:p>
+        </p:txBody>
+      </p:sp>
+      <p:sp>
+        <p:nvSpPr>
+          <p:cNvPr id="16" name="TextBox 15"/>
+          <p:cNvSpPr txBox="1"/>
+          <p:nvPr/>
+        </p:nvSpPr>
+        <p:spPr>
+          <a:xfrm>
+            <a:off x="6309360" y="3813047"/>
             <a:ext cx="5029200" cy="365760"/>
           </a:xfrm>
           <a:prstGeom prst="rect">
@@ -4844,26 +5181,65 @@
               </a:lnSpc>
             </a:pPr>
             <a:r>
-              <a:rPr sz="1500" b="1">
+              <a:rPr sz="1550" b="1">
                 <a:solidFill>
                   <a:srgbClr val="1C1915"/>
                 </a:solidFill>
                 <a:latin typeface="Helvetica Neue"/>
               </a:rPr>
-              <a:t>Export</a:t>
-            </a:r>
-          </a:p>
-        </p:txBody>
-      </p:sp>
-      <p:sp>
-        <p:nvSpPr>
-          <p:cNvPr id="11" name="TextBox 10"/>
-          <p:cNvSpPr txBox="1"/>
-          <p:nvPr/>
-        </p:nvSpPr>
-        <p:spPr>
-          <a:xfrm>
-            <a:off x="822960" y="4389120"/>
+              <a:t>Provenance on every row</a:t>
+            </a:r>
+          </a:p>
+        </p:txBody>
+      </p:sp>
+      <p:sp>
+        <p:nvSpPr>
+          <p:cNvPr id="17" name="TextBox 16"/>
+          <p:cNvSpPr txBox="1"/>
+          <p:nvPr/>
+        </p:nvSpPr>
+        <p:spPr>
+          <a:xfrm>
+            <a:off x="6309360" y="4087367"/>
+            <a:ext cx="5029200" cy="731520"/>
+          </a:xfrm>
+          <a:prstGeom prst="rect">
+            <a:avLst/>
+          </a:prstGeom>
+          <a:noFill/>
+        </p:spPr>
+        <p:txBody>
+          <a:bodyPr wrap="square" anchor="t" lIns="0" rIns="0" tIns="0" bIns="0">
+            <a:spAutoFit/>
+          </a:bodyPr>
+          <a:lstStyle/>
+          <a:p>
+            <a:pPr algn="l">
+              <a:lnSpc>
+                <a:spcPct val="125000"/>
+              </a:lnSpc>
+            </a:pPr>
+            <a:r>
+              <a:rPr sz="1300" b="0">
+                <a:solidFill>
+                  <a:srgbClr val="756D5E"/>
+                </a:solidFill>
+                <a:latin typeface="Helvetica Neue"/>
+              </a:rPr>
+              <a:t>Source, licence and page, so a notation can be checked against the book it came from.</a:t>
+            </a:r>
+          </a:p>
+        </p:txBody>
+      </p:sp>
+      <p:sp>
+        <p:nvSpPr>
+          <p:cNvPr id="18" name="TextBox 17"/>
+          <p:cNvSpPr txBox="1"/>
+          <p:nvPr/>
+        </p:nvSpPr>
+        <p:spPr>
+          <a:xfrm>
+            <a:off x="6309360" y="4782311"/>
             <a:ext cx="5029200" cy="365760"/>
           </a:xfrm>
           <a:prstGeom prst="rect">
@@ -4883,285 +5259,12 @@
               </a:lnSpc>
             </a:pPr>
             <a:r>
-              <a:rPr sz="1250" b="0">
-                <a:solidFill>
-                  <a:srgbClr val="756D5E"/>
-                </a:solidFill>
-                <a:latin typeface="Helvetica Neue"/>
-              </a:rPr>
-              <a:t>Print-quality PDF laid out as the tradition prints it, JSON, or contribute the reading to the library.</a:t>
-            </a:r>
-          </a:p>
-        </p:txBody>
-      </p:sp>
-      <p:sp>
-        <p:nvSpPr>
-          <p:cNvPr id="12" name="TextBox 11"/>
-          <p:cNvSpPr txBox="1"/>
-          <p:nvPr/>
-        </p:nvSpPr>
-        <p:spPr>
-          <a:xfrm>
-            <a:off x="6309360" y="1737360"/>
-            <a:ext cx="5029200" cy="365760"/>
-          </a:xfrm>
-          <a:prstGeom prst="rect">
-            <a:avLst/>
-          </a:prstGeom>
-          <a:noFill/>
-        </p:spPr>
-        <p:txBody>
-          <a:bodyPr wrap="square" anchor="t" lIns="0" rIns="0" tIns="0" bIns="0">
-            <a:spAutoFit/>
-          </a:bodyPr>
-          <a:lstStyle/>
-          <a:p>
-            <a:pPr algn="l">
-              <a:lnSpc>
-                <a:spcPct val="100000"/>
-              </a:lnSpc>
-            </a:pPr>
-            <a:r>
-              <a:rPr sz="1500" b="1">
+              <a:rPr sz="1550" b="1">
                 <a:solidFill>
                   <a:srgbClr val="1C1915"/>
                 </a:solidFill>
                 <a:latin typeface="Helvetica Neue"/>
               </a:rPr>
-              <a:t>A library of 598 compositions</a:t>
-            </a:r>
-          </a:p>
-        </p:txBody>
-      </p:sp>
-      <p:sp>
-        <p:nvSpPr>
-          <p:cNvPr id="13" name="TextBox 12"/>
-          <p:cNvSpPr txBox="1"/>
-          <p:nvPr/>
-        </p:nvSpPr>
-        <p:spPr>
-          <a:xfrm>
-            <a:off x="6309360" y="1975104"/>
-            <a:ext cx="5029200" cy="365760"/>
-          </a:xfrm>
-          <a:prstGeom prst="rect">
-            <a:avLst/>
-          </a:prstGeom>
-          <a:noFill/>
-        </p:spPr>
-        <p:txBody>
-          <a:bodyPr wrap="square" anchor="t" lIns="0" rIns="0" tIns="0" bIns="0">
-            <a:spAutoFit/>
-          </a:bodyPr>
-          <a:lstStyle/>
-          <a:p>
-            <a:pPr algn="l">
-              <a:lnSpc>
-                <a:spcPct val="100000"/>
-              </a:lnSpc>
-            </a:pPr>
-            <a:r>
-              <a:rPr sz="1250" b="0">
-                <a:solidFill>
-                  <a:srgbClr val="756D5E"/>
-                </a:solidFill>
-                <a:latin typeface="Helvetica Neue"/>
-              </a:rPr>
-              <a:t>42 with complete notation, searchable by ragam, tala, composer, deity and how complete the notation is.</a:t>
-            </a:r>
-          </a:p>
-        </p:txBody>
-      </p:sp>
-      <p:sp>
-        <p:nvSpPr>
-          <p:cNvPr id="14" name="TextBox 13"/>
-          <p:cNvSpPr txBox="1"/>
-          <p:nvPr/>
-        </p:nvSpPr>
-        <p:spPr>
-          <a:xfrm>
-            <a:off x="6309360" y="2542032"/>
-            <a:ext cx="5029200" cy="365760"/>
-          </a:xfrm>
-          <a:prstGeom prst="rect">
-            <a:avLst/>
-          </a:prstGeom>
-          <a:noFill/>
-        </p:spPr>
-        <p:txBody>
-          <a:bodyPr wrap="square" anchor="t" lIns="0" rIns="0" tIns="0" bIns="0">
-            <a:spAutoFit/>
-          </a:bodyPr>
-          <a:lstStyle/>
-          <a:p>
-            <a:pPr algn="l">
-              <a:lnSpc>
-                <a:spcPct val="100000"/>
-              </a:lnSpc>
-            </a:pPr>
-            <a:r>
-              <a:rPr sz="1500" b="1">
-                <a:solidFill>
-                  <a:srgbClr val="1C1915"/>
-                </a:solidFill>
-                <a:latin typeface="Helvetica Neue"/>
-              </a:rPr>
-              <a:t>939 ragams</a:t>
-            </a:r>
-          </a:p>
-        </p:txBody>
-      </p:sp>
-      <p:sp>
-        <p:nvSpPr>
-          <p:cNvPr id="15" name="TextBox 14"/>
-          <p:cNvSpPr txBox="1"/>
-          <p:nvPr/>
-        </p:nvSpPr>
-        <p:spPr>
-          <a:xfrm>
-            <a:off x="6309360" y="2779776"/>
-            <a:ext cx="5029200" cy="365760"/>
-          </a:xfrm>
-          <a:prstGeom prst="rect">
-            <a:avLst/>
-          </a:prstGeom>
-          <a:noFill/>
-        </p:spPr>
-        <p:txBody>
-          <a:bodyPr wrap="square" anchor="t" lIns="0" rIns="0" tIns="0" bIns="0">
-            <a:spAutoFit/>
-          </a:bodyPr>
-          <a:lstStyle/>
-          <a:p>
-            <a:pPr algn="l">
-              <a:lnSpc>
-                <a:spcPct val="100000"/>
-              </a:lnSpc>
-            </a:pPr>
-            <a:r>
-              <a:rPr sz="1250" b="0">
-                <a:solidFill>
-                  <a:srgbClr val="756D5E"/>
-                </a:solidFill>
-                <a:latin typeface="Helvetica Neue"/>
-              </a:rPr>
-              <a:t>All 72 melakartas and their janyas, with arohana/avarohana; 114 wired into the decoder as constraints.</a:t>
-            </a:r>
-          </a:p>
-        </p:txBody>
-      </p:sp>
-      <p:sp>
-        <p:nvSpPr>
-          <p:cNvPr id="16" name="TextBox 15"/>
-          <p:cNvSpPr txBox="1"/>
-          <p:nvPr/>
-        </p:nvSpPr>
-        <p:spPr>
-          <a:xfrm>
-            <a:off x="6309360" y="3346704"/>
-            <a:ext cx="5029200" cy="365760"/>
-          </a:xfrm>
-          <a:prstGeom prst="rect">
-            <a:avLst/>
-          </a:prstGeom>
-          <a:noFill/>
-        </p:spPr>
-        <p:txBody>
-          <a:bodyPr wrap="square" anchor="t" lIns="0" rIns="0" tIns="0" bIns="0">
-            <a:spAutoFit/>
-          </a:bodyPr>
-          <a:lstStyle/>
-          <a:p>
-            <a:pPr algn="l">
-              <a:lnSpc>
-                <a:spcPct val="100000"/>
-              </a:lnSpc>
-            </a:pPr>
-            <a:r>
-              <a:rPr sz="1500" b="1">
-                <a:solidFill>
-                  <a:srgbClr val="1C1915"/>
-                </a:solidFill>
-                <a:latin typeface="Helvetica Neue"/>
-              </a:rPr>
-              <a:t>Provenance on every row</a:t>
-            </a:r>
-          </a:p>
-        </p:txBody>
-      </p:sp>
-      <p:sp>
-        <p:nvSpPr>
-          <p:cNvPr id="17" name="TextBox 16"/>
-          <p:cNvSpPr txBox="1"/>
-          <p:nvPr/>
-        </p:nvSpPr>
-        <p:spPr>
-          <a:xfrm>
-            <a:off x="6309360" y="3584448"/>
-            <a:ext cx="5029200" cy="365760"/>
-          </a:xfrm>
-          <a:prstGeom prst="rect">
-            <a:avLst/>
-          </a:prstGeom>
-          <a:noFill/>
-        </p:spPr>
-        <p:txBody>
-          <a:bodyPr wrap="square" anchor="t" lIns="0" rIns="0" tIns="0" bIns="0">
-            <a:spAutoFit/>
-          </a:bodyPr>
-          <a:lstStyle/>
-          <a:p>
-            <a:pPr algn="l">
-              <a:lnSpc>
-                <a:spcPct val="100000"/>
-              </a:lnSpc>
-            </a:pPr>
-            <a:r>
-              <a:rPr sz="1250" b="0">
-                <a:solidFill>
-                  <a:srgbClr val="756D5E"/>
-                </a:solidFill>
-                <a:latin typeface="Helvetica Neue"/>
-              </a:rPr>
-              <a:t>Source, licence and page, so a notation can be checked against the book it came from.</a:t>
-            </a:r>
-          </a:p>
-        </p:txBody>
-      </p:sp>
-      <p:sp>
-        <p:nvSpPr>
-          <p:cNvPr id="18" name="TextBox 17"/>
-          <p:cNvSpPr txBox="1"/>
-          <p:nvPr/>
-        </p:nvSpPr>
-        <p:spPr>
-          <a:xfrm>
-            <a:off x="6309360" y="4151376"/>
-            <a:ext cx="5029200" cy="365760"/>
-          </a:xfrm>
-          <a:prstGeom prst="rect">
-            <a:avLst/>
-          </a:prstGeom>
-          <a:noFill/>
-        </p:spPr>
-        <p:txBody>
-          <a:bodyPr wrap="square" anchor="t" lIns="0" rIns="0" tIns="0" bIns="0">
-            <a:spAutoFit/>
-          </a:bodyPr>
-          <a:lstStyle/>
-          <a:p>
-            <a:pPr algn="l">
-              <a:lnSpc>
-                <a:spcPct val="100000"/>
-              </a:lnSpc>
-            </a:pPr>
-            <a:r>
-              <a:rPr sz="1500" b="1">
-                <a:solidFill>
-                  <a:srgbClr val="1C1915"/>
-                </a:solidFill>
-                <a:latin typeface="Helvetica Neue"/>
-              </a:rPr>
               <a:t>An AI teacher, optional</a:t>
             </a:r>
           </a:p>
@@ -5175,27 +5278,27 @@
         </p:nvSpPr>
         <p:spPr>
           <a:xfrm>
-            <a:off x="6309360" y="4389120"/>
-            <a:ext cx="5029200" cy="365760"/>
-          </a:xfrm>
-          <a:prstGeom prst="rect">
-            <a:avLst/>
-          </a:prstGeom>
-          <a:noFill/>
-        </p:spPr>
-        <p:txBody>
-          <a:bodyPr wrap="square" anchor="t" lIns="0" rIns="0" tIns="0" bIns="0">
-            <a:spAutoFit/>
-          </a:bodyPr>
-          <a:lstStyle/>
-          <a:p>
-            <a:pPr algn="l">
-              <a:lnSpc>
-                <a:spcPct val="100000"/>
-              </a:lnSpc>
-            </a:pPr>
-            <a:r>
-              <a:rPr sz="1250" b="0">
+            <a:off x="6309360" y="5056631"/>
+            <a:ext cx="5029200" cy="731520"/>
+          </a:xfrm>
+          <a:prstGeom prst="rect">
+            <a:avLst/>
+          </a:prstGeom>
+          <a:noFill/>
+        </p:spPr>
+        <p:txBody>
+          <a:bodyPr wrap="square" anchor="t" lIns="0" rIns="0" tIns="0" bIns="0">
+            <a:spAutoFit/>
+          </a:bodyPr>
+          <a:lstStyle/>
+          <a:p>
+            <a:pPr algn="l">
+              <a:lnSpc>
+                <a:spcPct val="125000"/>
+              </a:lnSpc>
+            </a:pPr>
+            <a:r>
+              <a:rPr sz="1300" b="0">
                 <a:solidFill>
                   <a:srgbClr val="756D5E"/>
                 </a:solidFill>
@@ -5319,7 +5422,7 @@
         <p:spPr>
           <a:xfrm>
             <a:off x="822960" y="1828800"/>
-            <a:ext cx="1673352" cy="1417320"/>
+            <a:ext cx="1574749" cy="1417320"/>
           </a:xfrm>
           <a:prstGeom prst="roundRect">
             <a:avLst>
@@ -5367,7 +5470,7 @@
         <p:spPr>
           <a:xfrm>
             <a:off x="822960" y="2029968"/>
-            <a:ext cx="1673352" cy="365760"/>
+            <a:ext cx="1574749" cy="365760"/>
           </a:xfrm>
           <a:prstGeom prst="rect">
             <a:avLst/>
@@ -5406,7 +5509,7 @@
         <p:spPr>
           <a:xfrm>
             <a:off x="822960" y="2432304"/>
-            <a:ext cx="1673352" cy="731520"/>
+            <a:ext cx="1574749" cy="731520"/>
           </a:xfrm>
           <a:prstGeom prst="rect">
             <a:avLst/>
@@ -5445,7 +5548,7 @@
         </p:nvSpPr>
         <p:spPr>
           <a:xfrm>
-            <a:off x="2496312" y="2331720"/>
+            <a:off x="2397709" y="2331720"/>
             <a:ext cx="256032" cy="365760"/>
           </a:xfrm>
           <a:prstGeom prst="rect">
@@ -5484,8 +5587,8 @@
         </p:nvSpPr>
         <p:spPr>
           <a:xfrm>
-            <a:off x="2752344" y="1828800"/>
-            <a:ext cx="1673352" cy="1417320"/>
+            <a:off x="2653741" y="1828800"/>
+            <a:ext cx="1574749" cy="1417320"/>
           </a:xfrm>
           <a:prstGeom prst="roundRect">
             <a:avLst>
@@ -5532,8 +5635,8 @@
         </p:nvSpPr>
         <p:spPr>
           <a:xfrm>
-            <a:off x="2752344" y="2029968"/>
-            <a:ext cx="1673352" cy="365760"/>
+            <a:off x="2653741" y="2029968"/>
+            <a:ext cx="1574749" cy="365760"/>
           </a:xfrm>
           <a:prstGeom prst="rect">
             <a:avLst/>
@@ -5571,8 +5674,8 @@
         </p:nvSpPr>
         <p:spPr>
           <a:xfrm>
-            <a:off x="2752344" y="2432304"/>
-            <a:ext cx="1673352" cy="731520"/>
+            <a:off x="2653741" y="2432304"/>
+            <a:ext cx="1574749" cy="731520"/>
           </a:xfrm>
           <a:prstGeom prst="rect">
             <a:avLst/>
@@ -5611,7 +5714,7 @@
         </p:nvSpPr>
         <p:spPr>
           <a:xfrm>
-            <a:off x="4425696" y="2331720"/>
+            <a:off x="4228490" y="2331720"/>
             <a:ext cx="256032" cy="365760"/>
           </a:xfrm>
           <a:prstGeom prst="rect">
@@ -5650,8 +5753,8 @@
         </p:nvSpPr>
         <p:spPr>
           <a:xfrm>
-            <a:off x="4681728" y="1828800"/>
-            <a:ext cx="1673352" cy="1417320"/>
+            <a:off x="4484522" y="1828800"/>
+            <a:ext cx="1574749" cy="1417320"/>
           </a:xfrm>
           <a:prstGeom prst="roundRect">
             <a:avLst>
@@ -5698,8 +5801,8 @@
         </p:nvSpPr>
         <p:spPr>
           <a:xfrm>
-            <a:off x="4681728" y="2029968"/>
-            <a:ext cx="1673352" cy="365760"/>
+            <a:off x="4484522" y="2029968"/>
+            <a:ext cx="1574749" cy="365760"/>
           </a:xfrm>
           <a:prstGeom prst="rect">
             <a:avLst/>
@@ -5737,8 +5840,8 @@
         </p:nvSpPr>
         <p:spPr>
           <a:xfrm>
-            <a:off x="4681728" y="2432304"/>
-            <a:ext cx="1673352" cy="731520"/>
+            <a:off x="4484522" y="2432304"/>
+            <a:ext cx="1574749" cy="731520"/>
           </a:xfrm>
           <a:prstGeom prst="rect">
             <a:avLst/>
@@ -5777,7 +5880,7 @@
         </p:nvSpPr>
         <p:spPr>
           <a:xfrm>
-            <a:off x="6355080" y="2331720"/>
+            <a:off x="6059271" y="2331720"/>
             <a:ext cx="256032" cy="365760"/>
           </a:xfrm>
           <a:prstGeom prst="rect">
@@ -5816,8 +5919,8 @@
         </p:nvSpPr>
         <p:spPr>
           <a:xfrm>
-            <a:off x="6611112" y="1828800"/>
-            <a:ext cx="1673352" cy="1417320"/>
+            <a:off x="6315303" y="1828800"/>
+            <a:ext cx="1574749" cy="1417320"/>
           </a:xfrm>
           <a:prstGeom prst="roundRect">
             <a:avLst>
@@ -5864,8 +5967,8 @@
         </p:nvSpPr>
         <p:spPr>
           <a:xfrm>
-            <a:off x="6611112" y="2029968"/>
-            <a:ext cx="1673352" cy="365760"/>
+            <a:off x="6315303" y="2029968"/>
+            <a:ext cx="1574749" cy="365760"/>
           </a:xfrm>
           <a:prstGeom prst="rect">
             <a:avLst/>
@@ -5903,8 +6006,8 @@
         </p:nvSpPr>
         <p:spPr>
           <a:xfrm>
-            <a:off x="6611112" y="2432304"/>
-            <a:ext cx="1673352" cy="731520"/>
+            <a:off x="6315303" y="2432304"/>
+            <a:ext cx="1574749" cy="731520"/>
           </a:xfrm>
           <a:prstGeom prst="rect">
             <a:avLst/>
@@ -5943,7 +6046,7 @@
         </p:nvSpPr>
         <p:spPr>
           <a:xfrm>
-            <a:off x="8284464" y="2331720"/>
+            <a:off x="7890052" y="2331720"/>
             <a:ext cx="256032" cy="365760"/>
           </a:xfrm>
           <a:prstGeom prst="rect">
@@ -5982,8 +6085,8 @@
         </p:nvSpPr>
         <p:spPr>
           <a:xfrm>
-            <a:off x="8540496" y="1828800"/>
-            <a:ext cx="1673352" cy="1417320"/>
+            <a:off x="8146084" y="1828800"/>
+            <a:ext cx="1574749" cy="1417320"/>
           </a:xfrm>
           <a:prstGeom prst="roundRect">
             <a:avLst>
@@ -6030,8 +6133,8 @@
         </p:nvSpPr>
         <p:spPr>
           <a:xfrm>
-            <a:off x="8540496" y="2029968"/>
-            <a:ext cx="1673352" cy="365760"/>
+            <a:off x="8146084" y="2029968"/>
+            <a:ext cx="1574749" cy="365760"/>
           </a:xfrm>
           <a:prstGeom prst="rect">
             <a:avLst/>
@@ -6069,8 +6172,8 @@
         </p:nvSpPr>
         <p:spPr>
           <a:xfrm>
-            <a:off x="8540496" y="2432304"/>
-            <a:ext cx="1673352" cy="731520"/>
+            <a:off x="8146084" y="2432304"/>
+            <a:ext cx="1574749" cy="731520"/>
           </a:xfrm>
           <a:prstGeom prst="rect">
             <a:avLst/>
@@ -6109,7 +6212,7 @@
         </p:nvSpPr>
         <p:spPr>
           <a:xfrm>
-            <a:off x="10213848" y="2331720"/>
+            <a:off x="9720833" y="2331720"/>
             <a:ext cx="256032" cy="365760"/>
           </a:xfrm>
           <a:prstGeom prst="rect">
@@ -6148,8 +6251,8 @@
         </p:nvSpPr>
         <p:spPr>
           <a:xfrm>
-            <a:off x="10469880" y="1828800"/>
-            <a:ext cx="1673352" cy="1417320"/>
+            <a:off x="9976865" y="1828800"/>
+            <a:ext cx="1574749" cy="1417320"/>
           </a:xfrm>
           <a:prstGeom prst="roundRect">
             <a:avLst>
@@ -6196,8 +6299,8 @@
         </p:nvSpPr>
         <p:spPr>
           <a:xfrm>
-            <a:off x="10469880" y="2029968"/>
-            <a:ext cx="1673352" cy="365760"/>
+            <a:off x="9976865" y="2029968"/>
+            <a:ext cx="1574749" cy="365760"/>
           </a:xfrm>
           <a:prstGeom prst="rect">
             <a:avLst/>
@@ -6235,8 +6338,8 @@
         </p:nvSpPr>
         <p:spPr>
           <a:xfrm>
-            <a:off x="10469880" y="2432304"/>
-            <a:ext cx="1673352" cy="731520"/>
+            <a:off x="9976865" y="2432304"/>
+            <a:ext cx="1574749" cy="731520"/>
           </a:xfrm>
           <a:prstGeom prst="rect">
             <a:avLst/>
@@ -6295,7 +6398,7 @@
               </a:lnSpc>
             </a:pPr>
             <a:r>
-              <a:rPr sz="1500" b="1">
+              <a:rPr sz="1550" b="1">
                 <a:solidFill>
                   <a:srgbClr val="1C1915"/>
                 </a:solidFill>
@@ -6314,27 +6417,27 @@
         </p:nvSpPr>
         <p:spPr>
           <a:xfrm>
-            <a:off x="822960" y="3986783"/>
-            <a:ext cx="5029200" cy="365760"/>
-          </a:xfrm>
-          <a:prstGeom prst="rect">
-            <a:avLst/>
-          </a:prstGeom>
-          <a:noFill/>
-        </p:spPr>
-        <p:txBody>
-          <a:bodyPr wrap="square" anchor="t" lIns="0" rIns="0" tIns="0" bIns="0">
-            <a:spAutoFit/>
-          </a:bodyPr>
-          <a:lstStyle/>
-          <a:p>
-            <a:pPr algn="l">
-              <a:lnSpc>
-                <a:spcPct val="100000"/>
-              </a:lnSpc>
-            </a:pPr>
-            <a:r>
-              <a:rPr sz="1250" b="0">
+            <a:off x="822960" y="4023359"/>
+            <a:ext cx="5029200" cy="731520"/>
+          </a:xfrm>
+          <a:prstGeom prst="rect">
+            <a:avLst/>
+          </a:prstGeom>
+          <a:noFill/>
+        </p:spPr>
+        <p:txBody>
+          <a:bodyPr wrap="square" anchor="t" lIns="0" rIns="0" tIns="0" bIns="0">
+            <a:spAutoFit/>
+          </a:bodyPr>
+          <a:lstStyle/>
+          <a:p>
+            <a:pPr algn="l">
+              <a:lnSpc>
+                <a:spcPct val="125000"/>
+              </a:lnSpc>
+            </a:pPr>
+            <a:r>
+              <a:rPr sz="1300" b="0">
                 <a:solidFill>
                   <a:srgbClr val="756D5E"/>
                 </a:solidFill>
@@ -6373,7 +6476,7 @@
               </a:lnSpc>
             </a:pPr>
             <a:r>
-              <a:rPr sz="1500" b="1">
+              <a:rPr sz="1550" b="1">
                 <a:solidFill>
                   <a:srgbClr val="1C1915"/>
                 </a:solidFill>
@@ -6392,27 +6495,27 @@
         </p:nvSpPr>
         <p:spPr>
           <a:xfrm>
-            <a:off x="822960" y="4809743"/>
-            <a:ext cx="5029200" cy="365760"/>
-          </a:xfrm>
-          <a:prstGeom prst="rect">
-            <a:avLst/>
-          </a:prstGeom>
-          <a:noFill/>
-        </p:spPr>
-        <p:txBody>
-          <a:bodyPr wrap="square" anchor="t" lIns="0" rIns="0" tIns="0" bIns="0">
-            <a:spAutoFit/>
-          </a:bodyPr>
-          <a:lstStyle/>
-          <a:p>
-            <a:pPr algn="l">
-              <a:lnSpc>
-                <a:spcPct val="100000"/>
-              </a:lnSpc>
-            </a:pPr>
-            <a:r>
-              <a:rPr sz="1250" b="0">
+            <a:off x="822960" y="4846319"/>
+            <a:ext cx="5029200" cy="731520"/>
+          </a:xfrm>
+          <a:prstGeom prst="rect">
+            <a:avLst/>
+          </a:prstGeom>
+          <a:noFill/>
+        </p:spPr>
+        <p:txBody>
+          <a:bodyPr wrap="square" anchor="t" lIns="0" rIns="0" tIns="0" bIns="0">
+            <a:spAutoFit/>
+          </a:bodyPr>
+          <a:lstStyle/>
+          <a:p>
+            <a:pPr algn="l">
+              <a:lnSpc>
+                <a:spcPct val="125000"/>
+              </a:lnSpc>
+            </a:pPr>
+            <a:r>
+              <a:rPr sz="1300" b="0">
                 <a:solidFill>
                   <a:srgbClr val="756D5E"/>
                 </a:solidFill>
@@ -6451,7 +6554,7 @@
               </a:lnSpc>
             </a:pPr>
             <a:r>
-              <a:rPr sz="1500" b="1">
+              <a:rPr sz="1550" b="1">
                 <a:solidFill>
                   <a:srgbClr val="1C1915"/>
                 </a:solidFill>
@@ -6470,27 +6573,27 @@
         </p:nvSpPr>
         <p:spPr>
           <a:xfrm>
-            <a:off x="6309360" y="3986783"/>
-            <a:ext cx="5029200" cy="365760"/>
-          </a:xfrm>
-          <a:prstGeom prst="rect">
-            <a:avLst/>
-          </a:prstGeom>
-          <a:noFill/>
-        </p:spPr>
-        <p:txBody>
-          <a:bodyPr wrap="square" anchor="t" lIns="0" rIns="0" tIns="0" bIns="0">
-            <a:spAutoFit/>
-          </a:bodyPr>
-          <a:lstStyle/>
-          <a:p>
-            <a:pPr algn="l">
-              <a:lnSpc>
-                <a:spcPct val="100000"/>
-              </a:lnSpc>
-            </a:pPr>
-            <a:r>
-              <a:rPr sz="1250" b="0">
+            <a:off x="6309360" y="4023359"/>
+            <a:ext cx="5029200" cy="731520"/>
+          </a:xfrm>
+          <a:prstGeom prst="rect">
+            <a:avLst/>
+          </a:prstGeom>
+          <a:noFill/>
+        </p:spPr>
+        <p:txBody>
+          <a:bodyPr wrap="square" anchor="t" lIns="0" rIns="0" tIns="0" bIns="0">
+            <a:spAutoFit/>
+          </a:bodyPr>
+          <a:lstStyle/>
+          <a:p>
+            <a:pPr algn="l">
+              <a:lnSpc>
+                <a:spcPct val="125000"/>
+              </a:lnSpc>
+            </a:pPr>
+            <a:r>
+              <a:rPr sz="1300" b="0">
                 <a:solidFill>
                   <a:srgbClr val="756D5E"/>
                 </a:solidFill>
@@ -6529,7 +6632,7 @@
               </a:lnSpc>
             </a:pPr>
             <a:r>
-              <a:rPr sz="1500" b="1">
+              <a:rPr sz="1550" b="1">
                 <a:solidFill>
                   <a:srgbClr val="1C1915"/>
                 </a:solidFill>
@@ -6548,27 +6651,27 @@
         </p:nvSpPr>
         <p:spPr>
           <a:xfrm>
-            <a:off x="6309360" y="4809743"/>
-            <a:ext cx="5029200" cy="365760"/>
-          </a:xfrm>
-          <a:prstGeom prst="rect">
-            <a:avLst/>
-          </a:prstGeom>
-          <a:noFill/>
-        </p:spPr>
-        <p:txBody>
-          <a:bodyPr wrap="square" anchor="t" lIns="0" rIns="0" tIns="0" bIns="0">
-            <a:spAutoFit/>
-          </a:bodyPr>
-          <a:lstStyle/>
-          <a:p>
-            <a:pPr algn="l">
-              <a:lnSpc>
-                <a:spcPct val="100000"/>
-              </a:lnSpc>
-            </a:pPr>
-            <a:r>
-              <a:rPr sz="1250" b="0">
+            <a:off x="6309360" y="4846319"/>
+            <a:ext cx="5029200" cy="731520"/>
+          </a:xfrm>
+          <a:prstGeom prst="rect">
+            <a:avLst/>
+          </a:prstGeom>
+          <a:noFill/>
+        </p:spPr>
+        <p:txBody>
+          <a:bodyPr wrap="square" anchor="t" lIns="0" rIns="0" tIns="0" bIns="0">
+            <a:spAutoFit/>
+          </a:bodyPr>
+          <a:lstStyle/>
+          <a:p>
+            <a:pPr algn="l">
+              <a:lnSpc>
+                <a:spcPct val="125000"/>
+              </a:lnSpc>
+            </a:pPr>
+            <a:r>
+              <a:rPr sz="1300" b="0">
                 <a:solidFill>
                   <a:srgbClr val="756D5E"/>
                 </a:solidFill>
@@ -7236,7 +7339,7 @@
         <p:spPr>
           <a:xfrm>
             <a:off x="822960" y="3977639"/>
-            <a:ext cx="10515600" cy="1737360"/>
+            <a:ext cx="10515600" cy="1417320"/>
           </a:xfrm>
           <a:prstGeom prst="roundRect">
             <a:avLst>
@@ -8128,7 +8231,7 @@
         </p:nvSpPr>
         <p:spPr>
           <a:xfrm>
-            <a:off x="822960" y="1691640"/>
+            <a:off x="822960" y="1874519"/>
             <a:ext cx="5029200" cy="365760"/>
           </a:xfrm>
           <a:prstGeom prst="rect">
@@ -8148,7 +8251,7 @@
               </a:lnSpc>
             </a:pPr>
             <a:r>
-              <a:rPr sz="1500" b="1">
+              <a:rPr sz="1550" b="1">
                 <a:solidFill>
                   <a:srgbClr val="1C1915"/>
                 </a:solidFill>
@@ -8167,7 +8270,46 @@
         </p:nvSpPr>
         <p:spPr>
           <a:xfrm>
-            <a:off x="822960" y="1929384"/>
+            <a:off x="822960" y="2148839"/>
+            <a:ext cx="5029200" cy="731520"/>
+          </a:xfrm>
+          <a:prstGeom prst="rect">
+            <a:avLst/>
+          </a:prstGeom>
+          <a:noFill/>
+        </p:spPr>
+        <p:txBody>
+          <a:bodyPr wrap="square" anchor="t" lIns="0" rIns="0" tIns="0" bIns="0">
+            <a:spAutoFit/>
+          </a:bodyPr>
+          <a:lstStyle/>
+          <a:p>
+            <a:pPr algn="l">
+              <a:lnSpc>
+                <a:spcPct val="125000"/>
+              </a:lnSpc>
+            </a:pPr>
+            <a:r>
+              <a:rPr sz="1300" b="0">
+                <a:solidFill>
+                  <a:srgbClr val="756D5E"/>
+                </a:solidFill>
+                <a:latin typeface="Helvetica Neue"/>
+              </a:rPr>
+              <a:t>A pitch histogram cannot separate ragams that share a svara set and differ by phrase. The user still has to name the ragam.</a:t>
+            </a:r>
+          </a:p>
+        </p:txBody>
+      </p:sp>
+      <p:sp>
+        <p:nvSpPr>
+          <p:cNvPr id="6" name="TextBox 5"/>
+          <p:cNvSpPr txBox="1"/>
+          <p:nvPr/>
+        </p:nvSpPr>
+        <p:spPr>
+          <a:xfrm>
+            <a:off x="822960" y="2843783"/>
             <a:ext cx="5029200" cy="365760"/>
           </a:xfrm>
           <a:prstGeom prst="rect">
@@ -8187,26 +8329,65 @@
               </a:lnSpc>
             </a:pPr>
             <a:r>
-              <a:rPr sz="1250" b="0">
+              <a:rPr sz="1550" b="1">
+                <a:solidFill>
+                  <a:srgbClr val="1C1915"/>
+                </a:solidFill>
+                <a:latin typeface="Helvetica Neue"/>
+              </a:rPr>
+              <a:t>Gamaka classification is coarse</a:t>
+            </a:r>
+          </a:p>
+        </p:txBody>
+      </p:sp>
+      <p:sp>
+        <p:nvSpPr>
+          <p:cNvPr id="7" name="TextBox 6"/>
+          <p:cNvSpPr txBox="1"/>
+          <p:nvPr/>
+        </p:nvSpPr>
+        <p:spPr>
+          <a:xfrm>
+            <a:off x="822960" y="3118103"/>
+            <a:ext cx="5029200" cy="731520"/>
+          </a:xfrm>
+          <a:prstGeom prst="rect">
+            <a:avLst/>
+          </a:prstGeom>
+          <a:noFill/>
+        </p:spPr>
+        <p:txBody>
+          <a:bodyPr wrap="square" anchor="t" lIns="0" rIns="0" tIns="0" bIns="0">
+            <a:spAutoFit/>
+          </a:bodyPr>
+          <a:lstStyle/>
+          <a:p>
+            <a:pPr algn="l">
+              <a:lnSpc>
+                <a:spcPct val="125000"/>
+              </a:lnSpc>
+            </a:pPr>
+            <a:r>
+              <a:rPr sz="1300" b="0">
                 <a:solidFill>
                   <a:srgbClr val="756D5E"/>
                 </a:solidFill>
                 <a:latin typeface="Helvetica Neue"/>
               </a:rPr>
-              <a:t>A pitch histogram cannot separate ragams that share a svara set and differ by phrase. The user still has to name the ragam.</a:t>
-            </a:r>
-          </a:p>
-        </p:txBody>
-      </p:sp>
-      <p:sp>
-        <p:nvSpPr>
-          <p:cNvPr id="6" name="TextBox 5"/>
-          <p:cNvSpPr txBox="1"/>
-          <p:nvPr/>
-        </p:nvSpPr>
-        <p:spPr>
-          <a:xfrm>
-            <a:off x="822960" y="2532888"/>
+              <a:t>Five machine labels, not the dasavidha taxonomy. It says 'kampita', not which kampita.</a:t>
+            </a:r>
+          </a:p>
+        </p:txBody>
+      </p:sp>
+      <p:sp>
+        <p:nvSpPr>
+          <p:cNvPr id="8" name="TextBox 7"/>
+          <p:cNvSpPr txBox="1"/>
+          <p:nvPr/>
+        </p:nvSpPr>
+        <p:spPr>
+          <a:xfrm>
+            <a:off x="822960" y="3813047"/>
             <a:ext cx="5029200" cy="365760"/>
           </a:xfrm>
           <a:prstGeom prst="rect">
@@ -8226,26 +8407,65 @@
               </a:lnSpc>
             </a:pPr>
             <a:r>
-              <a:rPr sz="1500" b="1">
+              <a:rPr sz="1550" b="1">
                 <a:solidFill>
                   <a:srgbClr val="1C1915"/>
                 </a:solidFill>
                 <a:latin typeface="Helvetica Neue"/>
               </a:rPr>
-              <a:t>Gamaka classification is coarse</a:t>
-            </a:r>
-          </a:p>
-        </p:txBody>
-      </p:sp>
-      <p:sp>
-        <p:nvSpPr>
-          <p:cNvPr id="7" name="TextBox 6"/>
-          <p:cNvSpPr txBox="1"/>
-          <p:nvPr/>
-        </p:nvSpPr>
-        <p:spPr>
-          <a:xfrm>
-            <a:off x="822960" y="2770632"/>
+              <a:t>Voicing false alarm is 35%</a:t>
+            </a:r>
+          </a:p>
+        </p:txBody>
+      </p:sp>
+      <p:sp>
+        <p:nvSpPr>
+          <p:cNvPr id="9" name="TextBox 8"/>
+          <p:cNvSpPr txBox="1"/>
+          <p:nvPr/>
+        </p:nvSpPr>
+        <p:spPr>
+          <a:xfrm>
+            <a:off x="822960" y="4087367"/>
+            <a:ext cx="5029200" cy="731520"/>
+          </a:xfrm>
+          <a:prstGeom prst="rect">
+            <a:avLst/>
+          </a:prstGeom>
+          <a:noFill/>
+        </p:spPr>
+        <p:txBody>
+          <a:bodyPr wrap="square" anchor="t" lIns="0" rIns="0" tIns="0" bIns="0">
+            <a:spAutoFit/>
+          </a:bodyPr>
+          <a:lstStyle/>
+          <a:p>
+            <a:pPr algn="l">
+              <a:lnSpc>
+                <a:spcPct val="125000"/>
+              </a:lnSpc>
+            </a:pPr>
+            <a:r>
+              <a:rPr sz="1300" b="0">
+                <a:solidFill>
+                  <a:srgbClr val="756D5E"/>
+                </a:solidFill>
+                <a:latin typeface="Helvetica Neue"/>
+              </a:rPr>
+              <a:t>It still calls notes in the gaps. The weakest number in the engine, and known.</a:t>
+            </a:r>
+          </a:p>
+        </p:txBody>
+      </p:sp>
+      <p:sp>
+        <p:nvSpPr>
+          <p:cNvPr id="10" name="TextBox 9"/>
+          <p:cNvSpPr txBox="1"/>
+          <p:nvPr/>
+        </p:nvSpPr>
+        <p:spPr>
+          <a:xfrm>
+            <a:off x="822960" y="4782311"/>
             <a:ext cx="5029200" cy="365760"/>
           </a:xfrm>
           <a:prstGeom prst="rect">
@@ -8265,26 +8485,65 @@
               </a:lnSpc>
             </a:pPr>
             <a:r>
-              <a:rPr sz="1250" b="0">
+              <a:rPr sz="1550" b="1">
+                <a:solidFill>
+                  <a:srgbClr val="1C1915"/>
+                </a:solidFill>
+                <a:latin typeface="Helvetica Neue"/>
+              </a:rPr>
+              <a:t>One voice, no ensemble</a:t>
+            </a:r>
+          </a:p>
+        </p:txBody>
+      </p:sp>
+      <p:sp>
+        <p:nvSpPr>
+          <p:cNvPr id="11" name="TextBox 10"/>
+          <p:cNvSpPr txBox="1"/>
+          <p:nvPr/>
+        </p:nvSpPr>
+        <p:spPr>
+          <a:xfrm>
+            <a:off x="822960" y="5056631"/>
+            <a:ext cx="5029200" cy="731520"/>
+          </a:xfrm>
+          <a:prstGeom prst="rect">
+            <a:avLst/>
+          </a:prstGeom>
+          <a:noFill/>
+        </p:spPr>
+        <p:txBody>
+          <a:bodyPr wrap="square" anchor="t" lIns="0" rIns="0" tIns="0" bIns="0">
+            <a:spAutoFit/>
+          </a:bodyPr>
+          <a:lstStyle/>
+          <a:p>
+            <a:pPr algn="l">
+              <a:lnSpc>
+                <a:spcPct val="125000"/>
+              </a:lnSpc>
+            </a:pPr>
+            <a:r>
+              <a:rPr sz="1300" b="0">
                 <a:solidFill>
                   <a:srgbClr val="756D5E"/>
                 </a:solidFill>
                 <a:latin typeface="Helvetica Neue"/>
               </a:rPr>
-              <a:t>Five machine labels, not the dasavidha taxonomy. It says 'kampita', not which kampita.</a:t>
-            </a:r>
-          </a:p>
-        </p:txBody>
-      </p:sp>
-      <p:sp>
-        <p:nvSpPr>
-          <p:cNvPr id="8" name="TextBox 7"/>
-          <p:cNvSpPr txBox="1"/>
-          <p:nvPr/>
-        </p:nvSpPr>
-        <p:spPr>
-          <a:xfrm>
-            <a:off x="822960" y="3374136"/>
+              <a:t>Trained on and scored against solo vocal. Accompaniment in the room degrades it.</a:t>
+            </a:r>
+          </a:p>
+        </p:txBody>
+      </p:sp>
+      <p:sp>
+        <p:nvSpPr>
+          <p:cNvPr id="12" name="TextBox 11"/>
+          <p:cNvSpPr txBox="1"/>
+          <p:nvPr/>
+        </p:nvSpPr>
+        <p:spPr>
+          <a:xfrm>
+            <a:off x="6309360" y="1874519"/>
             <a:ext cx="5029200" cy="365760"/>
           </a:xfrm>
           <a:prstGeom prst="rect">
@@ -8304,26 +8563,65 @@
               </a:lnSpc>
             </a:pPr>
             <a:r>
-              <a:rPr sz="1500" b="1">
+              <a:rPr sz="1550" b="1">
                 <a:solidFill>
                   <a:srgbClr val="1C1915"/>
                 </a:solidFill>
                 <a:latin typeface="Helvetica Neue"/>
               </a:rPr>
-              <a:t>Voicing false alarm is 35%</a:t>
-            </a:r>
-          </a:p>
-        </p:txBody>
-      </p:sp>
-      <p:sp>
-        <p:nvSpPr>
-          <p:cNvPr id="9" name="TextBox 8"/>
-          <p:cNvSpPr txBox="1"/>
-          <p:nvPr/>
-        </p:nvSpPr>
-        <p:spPr>
-          <a:xfrm>
-            <a:off x="822960" y="3611880"/>
+              <a:t>The library is mostly metadata</a:t>
+            </a:r>
+          </a:p>
+        </p:txBody>
+      </p:sp>
+      <p:sp>
+        <p:nvSpPr>
+          <p:cNvPr id="13" name="TextBox 12"/>
+          <p:cNvSpPr txBox="1"/>
+          <p:nvPr/>
+        </p:nvSpPr>
+        <p:spPr>
+          <a:xfrm>
+            <a:off x="6309360" y="2148839"/>
+            <a:ext cx="5029200" cy="731520"/>
+          </a:xfrm>
+          <a:prstGeom prst="rect">
+            <a:avLst/>
+          </a:prstGeom>
+          <a:noFill/>
+        </p:spPr>
+        <p:txBody>
+          <a:bodyPr wrap="square" anchor="t" lIns="0" rIns="0" tIns="0" bIns="0">
+            <a:spAutoFit/>
+          </a:bodyPr>
+          <a:lstStyle/>
+          <a:p>
+            <a:pPr algn="l">
+              <a:lnSpc>
+                <a:spcPct val="125000"/>
+              </a:lnSpc>
+            </a:pPr>
+            <a:r>
+              <a:rPr sz="1300" b="0">
+                <a:solidFill>
+                  <a:srgbClr val="756D5E"/>
+                </a:solidFill>
+                <a:latin typeface="Helvetica Neue"/>
+              </a:rPr>
+              <a:t>433 of 598 rows have no notation. Complete notation is not openly licensed at scale; that is a licensing wall, not an engineering one.</a:t>
+            </a:r>
+          </a:p>
+        </p:txBody>
+      </p:sp>
+      <p:sp>
+        <p:nvSpPr>
+          <p:cNvPr id="14" name="TextBox 13"/>
+          <p:cNvSpPr txBox="1"/>
+          <p:nvPr/>
+        </p:nvSpPr>
+        <p:spPr>
+          <a:xfrm>
+            <a:off x="6309360" y="2843783"/>
             <a:ext cx="5029200" cy="365760"/>
           </a:xfrm>
           <a:prstGeom prst="rect">
@@ -8343,26 +8641,65 @@
               </a:lnSpc>
             </a:pPr>
             <a:r>
-              <a:rPr sz="1250" b="0">
+              <a:rPr sz="1550" b="1">
+                <a:solidFill>
+                  <a:srgbClr val="1C1915"/>
+                </a:solidFill>
+                <a:latin typeface="Helvetica Neue"/>
+              </a:rPr>
+              <a:t>The SSP extractor verifies 44% of sections</a:t>
+            </a:r>
+          </a:p>
+        </p:txBody>
+      </p:sp>
+      <p:sp>
+        <p:nvSpPr>
+          <p:cNvPr id="15" name="TextBox 14"/>
+          <p:cNvSpPr txBox="1"/>
+          <p:nvPr/>
+        </p:nvSpPr>
+        <p:spPr>
+          <a:xfrm>
+            <a:off x="6309360" y="3118103"/>
+            <a:ext cx="5029200" cy="731520"/>
+          </a:xfrm>
+          <a:prstGeom prst="rect">
+            <a:avLst/>
+          </a:prstGeom>
+          <a:noFill/>
+        </p:spPr>
+        <p:txBody>
+          <a:bodyPr wrap="square" anchor="t" lIns="0" rIns="0" tIns="0" bIns="0">
+            <a:spAutoFit/>
+          </a:bodyPr>
+          <a:lstStyle/>
+          <a:p>
+            <a:pPr algn="l">
+              <a:lnSpc>
+                <a:spcPct val="125000"/>
+              </a:lnSpc>
+            </a:pPr>
+            <a:r>
+              <a:rPr sz="1300" b="0">
                 <a:solidFill>
                   <a:srgbClr val="756D5E"/>
                 </a:solidFill>
                 <a:latin typeface="Helvetica Neue"/>
               </a:rPr>
-              <a:t>It still calls notes in the gaps. The weakest number in the engine, and known.</a:t>
-            </a:r>
-          </a:p>
-        </p:txBody>
-      </p:sp>
-      <p:sp>
-        <p:nvSpPr>
-          <p:cNvPr id="10" name="TextBox 9"/>
-          <p:cNvSpPr txBox="1"/>
-          <p:nvPr/>
-        </p:nvSpPr>
-        <p:spPr>
-          <a:xfrm>
-            <a:off x="822960" y="4215384"/>
+              <a:t>Errors are per-glyph now — underline geometry, tight spacing. Each further point is slow work.</a:t>
+            </a:r>
+          </a:p>
+        </p:txBody>
+      </p:sp>
+      <p:sp>
+        <p:nvSpPr>
+          <p:cNvPr id="16" name="TextBox 15"/>
+          <p:cNvSpPr txBox="1"/>
+          <p:nvPr/>
+        </p:nvSpPr>
+        <p:spPr>
+          <a:xfrm>
+            <a:off x="6309360" y="3813047"/>
             <a:ext cx="5029200" cy="365760"/>
           </a:xfrm>
           <a:prstGeom prst="rect">
@@ -8382,26 +8719,65 @@
               </a:lnSpc>
             </a:pPr>
             <a:r>
-              <a:rPr sz="1500" b="1">
+              <a:rPr sz="1550" b="1">
                 <a:solidFill>
                   <a:srgbClr val="1C1915"/>
                 </a:solidFill>
                 <a:latin typeface="Helvetica Neue"/>
               </a:rPr>
-              <a:t>One voice, no ensemble</a:t>
-            </a:r>
-          </a:p>
-        </p:txBody>
-      </p:sp>
-      <p:sp>
-        <p:nvSpPr>
-          <p:cNvPr id="11" name="TextBox 10"/>
-          <p:cNvSpPr txBox="1"/>
-          <p:nvPr/>
-        </p:nvSpPr>
-        <p:spPr>
-          <a:xfrm>
-            <a:off x="822960" y="4453128"/>
+              <a:t>No Tyagaraja notation</a:t>
+            </a:r>
+          </a:p>
+        </p:txBody>
+      </p:sp>
+      <p:sp>
+        <p:nvSpPr>
+          <p:cNvPr id="17" name="TextBox 16"/>
+          <p:cNvSpPr txBox="1"/>
+          <p:nvPr/>
+        </p:nvSpPr>
+        <p:spPr>
+          <a:xfrm>
+            <a:off x="6309360" y="4087367"/>
+            <a:ext cx="5029200" cy="731520"/>
+          </a:xfrm>
+          <a:prstGeom prst="rect">
+            <a:avLst/>
+          </a:prstGeom>
+          <a:noFill/>
+        </p:spPr>
+        <p:txBody>
+          <a:bodyPr wrap="square" anchor="t" lIns="0" rIns="0" tIns="0" bIns="0">
+            <a:spAutoFit/>
+          </a:bodyPr>
+          <a:lstStyle/>
+          <a:p>
+            <a:pPr algn="l">
+              <a:lnSpc>
+                <a:spcPct val="125000"/>
+              </a:lnSpc>
+            </a:pPr>
+            <a:r>
+              <a:rPr sz="1300" b="0">
+                <a:solidFill>
+                  <a:srgbClr val="756D5E"/>
+                </a:solidFill>
+                <a:latin typeface="Helvetica Neue"/>
+              </a:rPr>
+              <a:t>SSP covers Dikshitar. The Walajapet manuscripts are scans with no text layer.</a:t>
+            </a:r>
+          </a:p>
+        </p:txBody>
+      </p:sp>
+      <p:sp>
+        <p:nvSpPr>
+          <p:cNvPr id="18" name="TextBox 17"/>
+          <p:cNvSpPr txBox="1"/>
+          <p:nvPr/>
+        </p:nvSpPr>
+        <p:spPr>
+          <a:xfrm>
+            <a:off x="6309360" y="4782311"/>
             <a:ext cx="5029200" cy="365760"/>
           </a:xfrm>
           <a:prstGeom prst="rect">
@@ -8421,285 +8797,12 @@
               </a:lnSpc>
             </a:pPr>
             <a:r>
-              <a:rPr sz="1250" b="0">
-                <a:solidFill>
-                  <a:srgbClr val="756D5E"/>
-                </a:solidFill>
-                <a:latin typeface="Helvetica Neue"/>
-              </a:rPr>
-              <a:t>Trained on and scored against solo vocal. Accompaniment in the room degrades it.</a:t>
-            </a:r>
-          </a:p>
-        </p:txBody>
-      </p:sp>
-      <p:sp>
-        <p:nvSpPr>
-          <p:cNvPr id="12" name="TextBox 11"/>
-          <p:cNvSpPr txBox="1"/>
-          <p:nvPr/>
-        </p:nvSpPr>
-        <p:spPr>
-          <a:xfrm>
-            <a:off x="6309360" y="1691640"/>
-            <a:ext cx="5029200" cy="365760"/>
-          </a:xfrm>
-          <a:prstGeom prst="rect">
-            <a:avLst/>
-          </a:prstGeom>
-          <a:noFill/>
-        </p:spPr>
-        <p:txBody>
-          <a:bodyPr wrap="square" anchor="t" lIns="0" rIns="0" tIns="0" bIns="0">
-            <a:spAutoFit/>
-          </a:bodyPr>
-          <a:lstStyle/>
-          <a:p>
-            <a:pPr algn="l">
-              <a:lnSpc>
-                <a:spcPct val="100000"/>
-              </a:lnSpc>
-            </a:pPr>
-            <a:r>
-              <a:rPr sz="1500" b="1">
+              <a:rPr sz="1550" b="1">
                 <a:solidFill>
                   <a:srgbClr val="1C1915"/>
                 </a:solidFill>
                 <a:latin typeface="Helvetica Neue"/>
               </a:rPr>
-              <a:t>The library is mostly metadata</a:t>
-            </a:r>
-          </a:p>
-        </p:txBody>
-      </p:sp>
-      <p:sp>
-        <p:nvSpPr>
-          <p:cNvPr id="13" name="TextBox 12"/>
-          <p:cNvSpPr txBox="1"/>
-          <p:nvPr/>
-        </p:nvSpPr>
-        <p:spPr>
-          <a:xfrm>
-            <a:off x="6309360" y="1929384"/>
-            <a:ext cx="5029200" cy="365760"/>
-          </a:xfrm>
-          <a:prstGeom prst="rect">
-            <a:avLst/>
-          </a:prstGeom>
-          <a:noFill/>
-        </p:spPr>
-        <p:txBody>
-          <a:bodyPr wrap="square" anchor="t" lIns="0" rIns="0" tIns="0" bIns="0">
-            <a:spAutoFit/>
-          </a:bodyPr>
-          <a:lstStyle/>
-          <a:p>
-            <a:pPr algn="l">
-              <a:lnSpc>
-                <a:spcPct val="100000"/>
-              </a:lnSpc>
-            </a:pPr>
-            <a:r>
-              <a:rPr sz="1250" b="0">
-                <a:solidFill>
-                  <a:srgbClr val="756D5E"/>
-                </a:solidFill>
-                <a:latin typeface="Helvetica Neue"/>
-              </a:rPr>
-              <a:t>433 of 598 rows have no notation. Complete notation is not openly licensed at scale; that is a licensing wall, not an engineering one.</a:t>
-            </a:r>
-          </a:p>
-        </p:txBody>
-      </p:sp>
-      <p:sp>
-        <p:nvSpPr>
-          <p:cNvPr id="14" name="TextBox 13"/>
-          <p:cNvSpPr txBox="1"/>
-          <p:nvPr/>
-        </p:nvSpPr>
-        <p:spPr>
-          <a:xfrm>
-            <a:off x="6309360" y="2532888"/>
-            <a:ext cx="5029200" cy="365760"/>
-          </a:xfrm>
-          <a:prstGeom prst="rect">
-            <a:avLst/>
-          </a:prstGeom>
-          <a:noFill/>
-        </p:spPr>
-        <p:txBody>
-          <a:bodyPr wrap="square" anchor="t" lIns="0" rIns="0" tIns="0" bIns="0">
-            <a:spAutoFit/>
-          </a:bodyPr>
-          <a:lstStyle/>
-          <a:p>
-            <a:pPr algn="l">
-              <a:lnSpc>
-                <a:spcPct val="100000"/>
-              </a:lnSpc>
-            </a:pPr>
-            <a:r>
-              <a:rPr sz="1500" b="1">
-                <a:solidFill>
-                  <a:srgbClr val="1C1915"/>
-                </a:solidFill>
-                <a:latin typeface="Helvetica Neue"/>
-              </a:rPr>
-              <a:t>The SSP extractor verifies 44% of sections</a:t>
-            </a:r>
-          </a:p>
-        </p:txBody>
-      </p:sp>
-      <p:sp>
-        <p:nvSpPr>
-          <p:cNvPr id="15" name="TextBox 14"/>
-          <p:cNvSpPr txBox="1"/>
-          <p:nvPr/>
-        </p:nvSpPr>
-        <p:spPr>
-          <a:xfrm>
-            <a:off x="6309360" y="2770632"/>
-            <a:ext cx="5029200" cy="365760"/>
-          </a:xfrm>
-          <a:prstGeom prst="rect">
-            <a:avLst/>
-          </a:prstGeom>
-          <a:noFill/>
-        </p:spPr>
-        <p:txBody>
-          <a:bodyPr wrap="square" anchor="t" lIns="0" rIns="0" tIns="0" bIns="0">
-            <a:spAutoFit/>
-          </a:bodyPr>
-          <a:lstStyle/>
-          <a:p>
-            <a:pPr algn="l">
-              <a:lnSpc>
-                <a:spcPct val="100000"/>
-              </a:lnSpc>
-            </a:pPr>
-            <a:r>
-              <a:rPr sz="1250" b="0">
-                <a:solidFill>
-                  <a:srgbClr val="756D5E"/>
-                </a:solidFill>
-                <a:latin typeface="Helvetica Neue"/>
-              </a:rPr>
-              <a:t>Errors are per-glyph now — underline geometry, tight spacing. Each further point is slow work.</a:t>
-            </a:r>
-          </a:p>
-        </p:txBody>
-      </p:sp>
-      <p:sp>
-        <p:nvSpPr>
-          <p:cNvPr id="16" name="TextBox 15"/>
-          <p:cNvSpPr txBox="1"/>
-          <p:nvPr/>
-        </p:nvSpPr>
-        <p:spPr>
-          <a:xfrm>
-            <a:off x="6309360" y="3374136"/>
-            <a:ext cx="5029200" cy="365760"/>
-          </a:xfrm>
-          <a:prstGeom prst="rect">
-            <a:avLst/>
-          </a:prstGeom>
-          <a:noFill/>
-        </p:spPr>
-        <p:txBody>
-          <a:bodyPr wrap="square" anchor="t" lIns="0" rIns="0" tIns="0" bIns="0">
-            <a:spAutoFit/>
-          </a:bodyPr>
-          <a:lstStyle/>
-          <a:p>
-            <a:pPr algn="l">
-              <a:lnSpc>
-                <a:spcPct val="100000"/>
-              </a:lnSpc>
-            </a:pPr>
-            <a:r>
-              <a:rPr sz="1500" b="1">
-                <a:solidFill>
-                  <a:srgbClr val="1C1915"/>
-                </a:solidFill>
-                <a:latin typeface="Helvetica Neue"/>
-              </a:rPr>
-              <a:t>No Tyagaraja notation</a:t>
-            </a:r>
-          </a:p>
-        </p:txBody>
-      </p:sp>
-      <p:sp>
-        <p:nvSpPr>
-          <p:cNvPr id="17" name="TextBox 16"/>
-          <p:cNvSpPr txBox="1"/>
-          <p:nvPr/>
-        </p:nvSpPr>
-        <p:spPr>
-          <a:xfrm>
-            <a:off x="6309360" y="3611880"/>
-            <a:ext cx="5029200" cy="365760"/>
-          </a:xfrm>
-          <a:prstGeom prst="rect">
-            <a:avLst/>
-          </a:prstGeom>
-          <a:noFill/>
-        </p:spPr>
-        <p:txBody>
-          <a:bodyPr wrap="square" anchor="t" lIns="0" rIns="0" tIns="0" bIns="0">
-            <a:spAutoFit/>
-          </a:bodyPr>
-          <a:lstStyle/>
-          <a:p>
-            <a:pPr algn="l">
-              <a:lnSpc>
-                <a:spcPct val="100000"/>
-              </a:lnSpc>
-            </a:pPr>
-            <a:r>
-              <a:rPr sz="1250" b="0">
-                <a:solidFill>
-                  <a:srgbClr val="756D5E"/>
-                </a:solidFill>
-                <a:latin typeface="Helvetica Neue"/>
-              </a:rPr>
-              <a:t>SSP covers Dikshitar. The Walajapet manuscripts are scans with no text layer.</a:t>
-            </a:r>
-          </a:p>
-        </p:txBody>
-      </p:sp>
-      <p:sp>
-        <p:nvSpPr>
-          <p:cNvPr id="18" name="TextBox 17"/>
-          <p:cNvSpPr txBox="1"/>
-          <p:nvPr/>
-        </p:nvSpPr>
-        <p:spPr>
-          <a:xfrm>
-            <a:off x="6309360" y="4215384"/>
-            <a:ext cx="5029200" cy="365760"/>
-          </a:xfrm>
-          <a:prstGeom prst="rect">
-            <a:avLst/>
-          </a:prstGeom>
-          <a:noFill/>
-        </p:spPr>
-        <p:txBody>
-          <a:bodyPr wrap="square" anchor="t" lIns="0" rIns="0" tIns="0" bIns="0">
-            <a:spAutoFit/>
-          </a:bodyPr>
-          <a:lstStyle/>
-          <a:p>
-            <a:pPr algn="l">
-              <a:lnSpc>
-                <a:spcPct val="100000"/>
-              </a:lnSpc>
-            </a:pPr>
-            <a:r>
-              <a:rPr sz="1500" b="1">
-                <a:solidFill>
-                  <a:srgbClr val="1C1915"/>
-                </a:solidFill>
-                <a:latin typeface="Helvetica Neue"/>
-              </a:rPr>
               <a:t>Not a substitute for a teacher</a:t>
             </a:r>
           </a:p>
@@ -8713,27 +8816,27 @@
         </p:nvSpPr>
         <p:spPr>
           <a:xfrm>
-            <a:off x="6309360" y="4453128"/>
-            <a:ext cx="5029200" cy="365760"/>
-          </a:xfrm>
-          <a:prstGeom prst="rect">
-            <a:avLst/>
-          </a:prstGeom>
-          <a:noFill/>
-        </p:spPr>
-        <p:txBody>
-          <a:bodyPr wrap="square" anchor="t" lIns="0" rIns="0" tIns="0" bIns="0">
-            <a:spAutoFit/>
-          </a:bodyPr>
-          <a:lstStyle/>
-          <a:p>
-            <a:pPr algn="l">
-              <a:lnSpc>
-                <a:spcPct val="100000"/>
-              </a:lnSpc>
-            </a:pPr>
-            <a:r>
-              <a:rPr sz="1250" b="0">
+            <a:off x="6309360" y="5056631"/>
+            <a:ext cx="5029200" cy="731520"/>
+          </a:xfrm>
+          <a:prstGeom prst="rect">
+            <a:avLst/>
+          </a:prstGeom>
+          <a:noFill/>
+        </p:spPr>
+        <p:txBody>
+          <a:bodyPr wrap="square" anchor="t" lIns="0" rIns="0" tIns="0" bIns="0">
+            <a:spAutoFit/>
+          </a:bodyPr>
+          <a:lstStyle/>
+          <a:p>
+            <a:pPr algn="l">
+              <a:lnSpc>
+                <a:spcPct val="125000"/>
+              </a:lnSpc>
+            </a:pPr>
+            <a:r>
+              <a:rPr sz="1300" b="0">
                 <a:solidFill>
                   <a:srgbClr val="756D5E"/>
                 </a:solidFill>
@@ -8857,7 +8960,7 @@
         <p:spPr>
           <a:xfrm>
             <a:off x="822960" y="1691640"/>
-            <a:ext cx="5120640" cy="3566160"/>
+            <a:ext cx="5120640" cy="3291840"/>
           </a:xfrm>
           <a:prstGeom prst="roundRect">
             <a:avLst>
@@ -8905,22 +9008,22 @@
         <p:spPr>
           <a:xfrm>
             <a:off x="1143000" y="1965960"/>
-            <a:ext cx="4480560" cy="3108960"/>
-          </a:xfrm>
-          <a:prstGeom prst="rect">
-            <a:avLst/>
-          </a:prstGeom>
-          <a:noFill/>
-        </p:spPr>
-        <p:txBody>
-          <a:bodyPr wrap="square" anchor="t" lIns="0" rIns="0" tIns="0" bIns="0">
-            <a:spAutoFit/>
-          </a:bodyPr>
-          <a:lstStyle/>
-          <a:p>
-            <a:pPr algn="l">
-              <a:lnSpc>
-                <a:spcPct val="135000"/>
+            <a:ext cx="4480560" cy="2926080"/>
+          </a:xfrm>
+          <a:prstGeom prst="rect">
+            <a:avLst/>
+          </a:prstGeom>
+          <a:noFill/>
+        </p:spPr>
+        <p:txBody>
+          <a:bodyPr wrap="square" anchor="t" lIns="0" rIns="0" tIns="0" bIns="0">
+            <a:spAutoFit/>
+          </a:bodyPr>
+          <a:lstStyle/>
+          <a:p>
+            <a:pPr algn="l">
+              <a:lnSpc>
+                <a:spcPct val="125000"/>
               </a:lnSpc>
             </a:pPr>
             <a:r>
@@ -8936,11 +9039,11 @@
           <a:p>
             <a:pPr algn="l">
               <a:lnSpc>
-                <a:spcPct val="135000"/>
-              </a:lnSpc>
-            </a:pPr>
-            <a:r>
-              <a:rPr sz="800" b="0">
+                <a:spcPct val="125000"/>
+              </a:lnSpc>
+            </a:pPr>
+            <a:r>
+              <a:rPr sz="900" b="0">
                 <a:solidFill>
                   <a:srgbClr val="756D5E"/>
                 </a:solidFill>
@@ -8952,7 +9055,7 @@
           <a:p>
             <a:pPr algn="l">
               <a:lnSpc>
-                <a:spcPct val="135000"/>
+                <a:spcPct val="125000"/>
               </a:lnSpc>
             </a:pPr>
             <a:r>
@@ -8962,13 +9065,29 @@
                 </a:solidFill>
                 <a:latin typeface="Helvetica Neue"/>
               </a:rPr>
-              <a:t>Tuners that name the svara you are holding — Carnatic Tuner, Shruti.</a:t>
-            </a:r>
-          </a:p>
-          <a:p>
-            <a:pPr algn="l">
-              <a:lnSpc>
-                <a:spcPct val="135000"/>
+              <a:t>·  Tuners that name the svara you are holding — Carnatic Tuner, Shruti.</a:t>
+            </a:r>
+          </a:p>
+          <a:p>
+            <a:pPr algn="l">
+              <a:lnSpc>
+                <a:spcPct val="125000"/>
+              </a:lnSpc>
+            </a:pPr>
+            <a:r>
+              <a:rPr sz="600" b="0">
+                <a:solidFill>
+                  <a:srgbClr val="756D5E"/>
+                </a:solidFill>
+                <a:latin typeface="Helvetica Neue"/>
+              </a:rPr>
+              <a:t/>
+            </a:r>
+          </a:p>
+          <a:p>
+            <a:pPr algn="l">
+              <a:lnSpc>
+                <a:spcPct val="125000"/>
               </a:lnSpc>
             </a:pPr>
             <a:r>
@@ -8978,13 +9097,29 @@
                 </a:solidFill>
                 <a:latin typeface="Helvetica Neue"/>
               </a:rPr>
-              <a:t>Practice apps with pitch feedback and lesson tracks — Carnatic Singer, Riyaz.</a:t>
-            </a:r>
-          </a:p>
-          <a:p>
-            <a:pPr algn="l">
-              <a:lnSpc>
-                <a:spcPct val="135000"/>
+              <a:t>·  Practice apps with pitch feedback and lesson tracks — Carnatic Singer, Riyaz.</a:t>
+            </a:r>
+          </a:p>
+          <a:p>
+            <a:pPr algn="l">
+              <a:lnSpc>
+                <a:spcPct val="125000"/>
+              </a:lnSpc>
+            </a:pPr>
+            <a:r>
+              <a:rPr sz="600" b="0">
+                <a:solidFill>
+                  <a:srgbClr val="756D5E"/>
+                </a:solidFill>
+                <a:latin typeface="Helvetica Neue"/>
+              </a:rPr>
+              <a:t/>
+            </a:r>
+          </a:p>
+          <a:p>
+            <a:pPr algn="l">
+              <a:lnSpc>
+                <a:spcPct val="125000"/>
               </a:lnSpc>
             </a:pPr>
             <a:r>
@@ -8994,13 +9129,29 @@
                 </a:solidFill>
                 <a:latin typeface="Helvetica Neue"/>
               </a:rPr>
-              <a:t>AI accompaniment and raga detection — NaadSadhana, an Apple Design Award winner with 410 ragas.</a:t>
-            </a:r>
-          </a:p>
-          <a:p>
-            <a:pPr algn="l">
-              <a:lnSpc>
-                <a:spcPct val="135000"/>
+              <a:t>·  AI accompaniment and raga detection — NaadSadhana, an Apple Design Award winner with 410 ragas.</a:t>
+            </a:r>
+          </a:p>
+          <a:p>
+            <a:pPr algn="l">
+              <a:lnSpc>
+                <a:spcPct val="125000"/>
+              </a:lnSpc>
+            </a:pPr>
+            <a:r>
+              <a:rPr sz="600" b="0">
+                <a:solidFill>
+                  <a:srgbClr val="756D5E"/>
+                </a:solidFill>
+                <a:latin typeface="Helvetica Neue"/>
+              </a:rPr>
+              <a:t/>
+            </a:r>
+          </a:p>
+          <a:p>
+            <a:pPr algn="l">
+              <a:lnSpc>
+                <a:spcPct val="125000"/>
               </a:lnSpc>
             </a:pPr>
             <a:r>
@@ -9010,13 +9161,29 @@
                 </a:solidFill>
                 <a:latin typeface="Helvetica Neue"/>
               </a:rPr>
-              <a:t>Notation typing tools — Haathi Carnatic Editor.</a:t>
-            </a:r>
-          </a:p>
-          <a:p>
-            <a:pPr algn="l">
-              <a:lnSpc>
-                <a:spcPct val="135000"/>
+              <a:t>·  Notation typing tools — Haathi Carnatic Editor.</a:t>
+            </a:r>
+          </a:p>
+          <a:p>
+            <a:pPr algn="l">
+              <a:lnSpc>
+                <a:spcPct val="125000"/>
+              </a:lnSpc>
+            </a:pPr>
+            <a:r>
+              <a:rPr sz="600" b="0">
+                <a:solidFill>
+                  <a:srgbClr val="756D5E"/>
+                </a:solidFill>
+                <a:latin typeface="Helvetica Neue"/>
+              </a:rPr>
+              <a:t/>
+            </a:r>
+          </a:p>
+          <a:p>
+            <a:pPr algn="l">
+              <a:lnSpc>
+                <a:spcPct val="125000"/>
               </a:lnSpc>
             </a:pPr>
             <a:r>
@@ -9026,7 +9193,7 @@
                 </a:solidFill>
                 <a:latin typeface="Helvetica Neue"/>
               </a:rPr>
-              <a:t>Research corpora — CompMusic, Saraga, Sanidha.</a:t>
+              <a:t>·  Research corpora — CompMusic, Saraga, Sanidha.</a:t>
             </a:r>
           </a:p>
         </p:txBody>
@@ -9040,7 +9207,7 @@
         <p:spPr>
           <a:xfrm>
             <a:off x="6309360" y="1691640"/>
-            <a:ext cx="5029200" cy="3566160"/>
+            <a:ext cx="5029200" cy="3291840"/>
           </a:xfrm>
           <a:prstGeom prst="roundRect">
             <a:avLst>
@@ -9088,22 +9255,22 @@
         <p:spPr>
           <a:xfrm>
             <a:off x="6629400" y="1965960"/>
-            <a:ext cx="4389120" cy="3108960"/>
-          </a:xfrm>
-          <a:prstGeom prst="rect">
-            <a:avLst/>
-          </a:prstGeom>
-          <a:noFill/>
-        </p:spPr>
-        <p:txBody>
-          <a:bodyPr wrap="square" anchor="t" lIns="0" rIns="0" tIns="0" bIns="0">
-            <a:spAutoFit/>
-          </a:bodyPr>
-          <a:lstStyle/>
-          <a:p>
-            <a:pPr algn="l">
-              <a:lnSpc>
-                <a:spcPct val="135000"/>
+            <a:ext cx="4389120" cy="2926080"/>
+          </a:xfrm>
+          <a:prstGeom prst="rect">
+            <a:avLst/>
+          </a:prstGeom>
+          <a:noFill/>
+        </p:spPr>
+        <p:txBody>
+          <a:bodyPr wrap="square" anchor="t" lIns="0" rIns="0" tIns="0" bIns="0">
+            <a:spAutoFit/>
+          </a:bodyPr>
+          <a:lstStyle/>
+          <a:p>
+            <a:pPr algn="l">
+              <a:lnSpc>
+                <a:spcPct val="125000"/>
               </a:lnSpc>
             </a:pPr>
             <a:r>
@@ -9119,11 +9286,11 @@
           <a:p>
             <a:pPr algn="l">
               <a:lnSpc>
-                <a:spcPct val="135000"/>
-              </a:lnSpc>
-            </a:pPr>
-            <a:r>
-              <a:rPr sz="800" b="0">
+                <a:spcPct val="125000"/>
+              </a:lnSpc>
+            </a:pPr>
+            <a:r>
+              <a:rPr sz="900" b="0">
                 <a:solidFill>
                   <a:srgbClr val="756D5E"/>
                 </a:solidFill>
@@ -9135,7 +9302,7 @@
           <a:p>
             <a:pPr algn="l">
               <a:lnSpc>
-                <a:spcPct val="135000"/>
+                <a:spcPct val="125000"/>
               </a:lnSpc>
             </a:pPr>
             <a:r>
@@ -9145,13 +9312,29 @@
                 </a:solidFill>
                 <a:latin typeface="Helvetica Neue"/>
               </a:rPr>
-              <a:t>Continuous transcription of a phrase into tala-aligned notation, not just the current note.</a:t>
-            </a:r>
-          </a:p>
-          <a:p>
-            <a:pPr algn="l">
-              <a:lnSpc>
-                <a:spcPct val="135000"/>
+              <a:t>·  Continuous transcription of a phrase into tala-aligned notation, not just the current note.</a:t>
+            </a:r>
+          </a:p>
+          <a:p>
+            <a:pPr algn="l">
+              <a:lnSpc>
+                <a:spcPct val="125000"/>
+              </a:lnSpc>
+            </a:pPr>
+            <a:r>
+              <a:rPr sz="600" b="0">
+                <a:solidFill>
+                  <a:srgbClr val="756D5E"/>
+                </a:solidFill>
+                <a:latin typeface="Helvetica Neue"/>
+              </a:rPr>
+              <a:t/>
+            </a:r>
+          </a:p>
+          <a:p>
+            <a:pPr algn="l">
+              <a:lnSpc>
+                <a:spcPct val="125000"/>
               </a:lnSpc>
             </a:pPr>
             <a:r>
@@ -9161,13 +9344,29 @@
                 </a:solidFill>
                 <a:latin typeface="Helvetica Neue"/>
               </a:rPr>
-              <a:t>Runs entirely in the browser — no install, no account, works offline.</a:t>
-            </a:r>
-          </a:p>
-          <a:p>
-            <a:pPr algn="l">
-              <a:lnSpc>
-                <a:spcPct val="135000"/>
+              <a:t>·  Runs entirely in the browser — no install, no account, works offline.</a:t>
+            </a:r>
+          </a:p>
+          <a:p>
+            <a:pPr algn="l">
+              <a:lnSpc>
+                <a:spcPct val="125000"/>
+              </a:lnSpc>
+            </a:pPr>
+            <a:r>
+              <a:rPr sz="600" b="0">
+                <a:solidFill>
+                  <a:srgbClr val="756D5E"/>
+                </a:solidFill>
+                <a:latin typeface="Helvetica Neue"/>
+              </a:rPr>
+              <a:t/>
+            </a:r>
+          </a:p>
+          <a:p>
+            <a:pPr algn="l">
+              <a:lnSpc>
+                <a:spcPct val="125000"/>
               </a:lnSpc>
             </a:pPr>
             <a:r>
@@ -9177,13 +9376,29 @@
                 </a:solidFill>
                 <a:latin typeface="Helvetica Neue"/>
               </a:rPr>
-              <a:t>Published accuracy against public datasets, with the harness in the repo.</a:t>
-            </a:r>
-          </a:p>
-          <a:p>
-            <a:pPr algn="l">
-              <a:lnSpc>
-                <a:spcPct val="135000"/>
+              <a:t>·  Published accuracy against public datasets, with the harness in the repo.</a:t>
+            </a:r>
+          </a:p>
+          <a:p>
+            <a:pPr algn="l">
+              <a:lnSpc>
+                <a:spcPct val="125000"/>
+              </a:lnSpc>
+            </a:pPr>
+            <a:r>
+              <a:rPr sz="600" b="0">
+                <a:solidFill>
+                  <a:srgbClr val="756D5E"/>
+                </a:solidFill>
+                <a:latin typeface="Helvetica Neue"/>
+              </a:rPr>
+              <a:t/>
+            </a:r>
+          </a:p>
+          <a:p>
+            <a:pPr algn="l">
+              <a:lnSpc>
+                <a:spcPct val="125000"/>
               </a:lnSpc>
             </a:pPr>
             <a:r>
@@ -9193,7 +9408,7 @@
                 </a:solidFill>
                 <a:latin typeface="Helvetica Neue"/>
               </a:rPr>
-              <a:t>A machine-readable SSP corpus with provenance — as far as we know, the first.</a:t>
+              <a:t>·  A machine-readable SSP corpus with provenance — as far as we know, the first.</a:t>
             </a:r>
           </a:p>
         </p:txBody>
@@ -9206,8 +9421,8 @@
         </p:nvSpPr>
         <p:spPr>
           <a:xfrm>
-            <a:off x="822960" y="5440680"/>
-            <a:ext cx="10515600" cy="457200"/>
+            <a:off x="822960" y="5230368"/>
+            <a:ext cx="10515600" cy="548640"/>
           </a:xfrm>
           <a:prstGeom prst="rect">
             <a:avLst/>

--- a/SruthiScribe-pitch.pptx
+++ b/SruthiScribe-pitch.pptx
@@ -3300,7 +3300,7 @@
                 </a:solidFill>
                 <a:latin typeface="Menlo"/>
               </a:rPr>
-              <a:t>Vinoth Kannan  ·  vinoth.kannan.eu(at)gmail.com</a:t>
+              <a:t>Vinoth Kannan  ·  vinoth.kannan.eu@gmail.com</a:t>
             </a:r>
           </a:p>
           <a:p>
@@ -3594,7 +3594,7 @@
                 </a:solidFill>
                 <a:latin typeface="Menlo"/>
               </a:rPr>
-              <a:t>Questions, corrections, missing compositions — Vinoth Kannan, vinoth.kannan.eu(at)gmail.com</a:t>
+              <a:t>Questions, corrections, missing compositions — Vinoth Kannan, vinoth.kannan.eu@gmail.com</a:t>
             </a:r>
           </a:p>
         </p:txBody>

--- a/SruthiScribe-pitch.pptx
+++ b/SruthiScribe-pitch.pptx
@@ -6868,7 +6868,7 @@
                 </a:solidFill>
                 <a:latin typeface="Georgia"/>
               </a:rPr>
-              <a:t>79.3%</a:t>
+              <a:t>84.9%</a:t>
             </a:r>
           </a:p>
         </p:txBody>

--- a/SruthiScribe-pitch.pptx
+++ b/SruthiScribe-pitch.pptx
@@ -6868,7 +6868,7 @@
                 </a:solidFill>
                 <a:latin typeface="Georgia"/>
               </a:rPr>
-              <a:t>84.9%</a:t>
+              <a:t>90.0%</a:t>
             </a:r>
           </a:p>
         </p:txBody>
@@ -6995,7 +6995,7 @@
                 </a:solidFill>
                 <a:latin typeface="Georgia"/>
               </a:rPr>
-              <a:t>82.4%</a:t>
+              <a:t>82.5%</a:t>
             </a:r>
           </a:p>
         </p:txBody>
@@ -7247,7 +7247,7 @@
                 </a:solidFill>
                 <a:latin typeface="Georgia"/>
               </a:rPr>
-              <a:t>7.6¢</a:t>
+              <a:t>3.2¢</a:t>
             </a:r>
           </a:p>
         </p:txBody>

--- a/SruthiScribe-pitch.pptx
+++ b/SruthiScribe-pitch.pptx
@@ -6868,7 +6868,7 @@
                 </a:solidFill>
                 <a:latin typeface="Georgia"/>
               </a:rPr>
-              <a:t>90.0%</a:t>
+              <a:t>91.1%</a:t>
             </a:r>
           </a:p>
         </p:txBody>
@@ -7121,7 +7121,7 @@
                 </a:solidFill>
                 <a:latin typeface="Georgia"/>
               </a:rPr>
-              <a:t>2.7%</a:t>
+              <a:t>2.5%</a:t>
             </a:r>
           </a:p>
         </p:txBody>

--- a/SruthiScribe-pitch.pptx
+++ b/SruthiScribe-pitch.pptx
@@ -8257,7 +8257,7 @@
                 </a:solidFill>
                 <a:latin typeface="Helvetica Neue"/>
               </a:rPr>
-              <a:t>Ragam identification is weak — 12% top-1</a:t>
+              <a:t>Ragam identification is weak — 15% top-1</a:t>
             </a:r>
           </a:p>
         </p:txBody>
@@ -8413,7 +8413,7 @@
                 </a:solidFill>
                 <a:latin typeface="Helvetica Neue"/>
               </a:rPr>
-              <a:t>Voicing false alarm is 35%</a:t>
+              <a:t>Voicing false alarm is 32%</a:t>
             </a:r>
           </a:p>
         </p:txBody>

--- a/SruthiScribe-pitch.pptx
+++ b/SruthiScribe-pitch.pptx
@@ -6868,7 +6868,7 @@
                 </a:solidFill>
                 <a:latin typeface="Georgia"/>
               </a:rPr>
-              <a:t>91.1%</a:t>
+              <a:t>91.7%</a:t>
             </a:r>
           </a:p>
         </p:txBody>

--- a/SruthiScribe-pitch.pptx
+++ b/SruthiScribe-pitch.pptx
@@ -3594,7 +3594,7 @@
                 </a:solidFill>
                 <a:latin typeface="Menlo"/>
               </a:rPr>
-              <a:t>Questions, corrections, missing compositions — Vinoth Kannan, vinoth.kannan.eu@gmail.com</a:t>
+              <a:t>Questions, corrections, missing compositions — Vinoth Kannan, vinoth.kannan.eu@gmail.com  ·  © 2026, all rights reserved</a:t>
             </a:r>
           </a:p>
         </p:txBody>

--- a/SruthiScribe-pitch.pptx
+++ b/SruthiScribe-pitch.pptx
@@ -5148,7 +5148,7 @@
                 </a:solidFill>
                 <a:latin typeface="Helvetica Neue"/>
               </a:rPr>
-              <a:t>All 72 melakartas and their janyas, with arohana/avarohana; 114 wired into the decoder as constraints.</a:t>
+              <a:t>All 72 melakartas and their janyas, with arohana/avarohana; 120 wired into the decoder as constraints.</a:t>
             </a:r>
           </a:p>
         </p:txBody>
@@ -6443,7 +6443,7 @@
                 </a:solidFill>
                 <a:latin typeface="Helvetica Neue"/>
               </a:rPr>
-              <a:t>The engine is 44 kB of dependency-free JavaScript. Transcription works offline; nothing is uploaded.</a:t>
+              <a:t>The engine is 46 kB of dependency-free JavaScript. Transcription works offline; nothing is uploaded.</a:t>
             </a:r>
           </a:p>
         </p:txBody>
@@ -7325,7 +7325,7 @@
                 </a:solidFill>
                 <a:latin typeface="Helvetica Neue"/>
               </a:rPr>
-              <a:t>Scored on 33 items of Sanidha (Georgia Tech), studio multitrack, against the dataset's own pitch annotations.</a:t>
+              <a:t>Scored on 33 items of Sanidha (Georgia Tech, CC BY 4.0), studio multitrack, against the dataset's own pitch annotations. It declines 27% of sung frames rather than guess them.</a:t>
             </a:r>
           </a:p>
         </p:txBody>
@@ -7339,7 +7339,7 @@
         <p:spPr>
           <a:xfrm>
             <a:off x="822960" y="3977639"/>
-            <a:ext cx="10515600" cy="1417320"/>
+            <a:ext cx="10515600" cy="1645920"/>
           </a:xfrm>
           <a:prstGeom prst="roundRect">
             <a:avLst>
@@ -7387,7 +7387,7 @@
         <p:spPr>
           <a:xfrm>
             <a:off x="1143000" y="4206240"/>
-            <a:ext cx="9875520" cy="1371600"/>
+            <a:ext cx="9875520" cy="1554480"/>
           </a:xfrm>
           <a:prstGeom prst="rect">
             <a:avLst/>
@@ -7428,7 +7428,7 @@
                 </a:solidFill>
                 <a:latin typeface="Helvetica Neue"/>
               </a:rPr>
-              <a:t>The harness runs the engine that ships, not a copy. Records whose published annotation disagrees with their own audio are detected and excluded rather than averaged in — three of Sanidha's are annotated an octave high. Every engine change is confirmed on a held-out split before it lands.</a:t>
+              <a:t>The harness runs the engine that ships, not a copy. Every change must improve two datasets (Sanidha and Saraga), both halves of a holdout split, and survive a deliberately mis-set tonic before it lands — what helps one corpus and hurts the other is rejected. Annotation faults are handled in the open: three records whose contour tracks another instrument are excluded, and frames the dataset itself doubled an octave are repaired by rules that read only the reference, never the engine's output. The web page publishes these same figures, and a test fails if they drift from the measurement.</a:t>
             </a:r>
           </a:p>
         </p:txBody>
@@ -8413,7 +8413,7 @@
                 </a:solidFill>
                 <a:latin typeface="Helvetica Neue"/>
               </a:rPr>
-              <a:t>Voicing false alarm is 32%</a:t>
+              <a:t>It abstains, and it false-alarms</a:t>
             </a:r>
           </a:p>
         </p:txBody>
@@ -8452,7 +8452,7 @@
                 </a:solidFill>
                 <a:latin typeface="Helvetica Neue"/>
               </a:rPr>
-              <a:t>It still calls notes in the gaps. The weakest number in the engine, and known.</a:t>
+              <a:t>27% of sung frames get no svara — declined, not guessed — and 32% of silences still get called a note.</a:t>
             </a:r>
           </a:p>
         </p:txBody>

--- a/SruthiScribe-pitch.pptx
+++ b/SruthiScribe-pitch.pptx
@@ -3261,7 +3261,7 @@
                 </a:solidFill>
                 <a:latin typeface="Helvetica Neue"/>
               </a:rPr>
-              <a:t>A browser-based Carnatic transcription engine and an open, machine-readable library of the repertoire.</a:t>
+              <a:t>A browser-based Carnatic transcription engine, an open machine-readable library of the repertoire, and guided practice against it.</a:t>
             </a:r>
           </a:p>
         </p:txBody>
@@ -3558,6 +3558,38 @@
               <a:t>·  Attach openly-licensed audio to notated works, so a student can hear and read together.</a:t>
             </a:r>
           </a:p>
+          <a:p>
+            <a:pPr algn="l">
+              <a:lnSpc>
+                <a:spcPct val="125000"/>
+              </a:lnSpc>
+            </a:pPr>
+            <a:r>
+              <a:rPr sz="1500" b="0">
+                <a:solidFill>
+                  <a:srgbClr val="756D5E"/>
+                </a:solidFill>
+                <a:latin typeface="Helvetica Neue"/>
+              </a:rPr>
+              <a:t/>
+            </a:r>
+          </a:p>
+          <a:p>
+            <a:pPr algn="l">
+              <a:lnSpc>
+                <a:spcPct val="125000"/>
+              </a:lnSpc>
+            </a:pPr>
+            <a:r>
+              <a:rPr sz="1500" b="0">
+                <a:solidFill>
+                  <a:srgbClr val="453F36"/>
+                </a:solidFill>
+                <a:latin typeface="Helvetica Neue"/>
+              </a:rPr>
+              <a:t>·  Take Sadhana from pitch to timing — holding a svara for the right number of aksharas is half of singing in tala.</a:t>
+            </a:r>
+          </a:p>
         </p:txBody>
       </p:sp>
       <p:sp>
@@ -4235,7 +4267,7 @@
                 </a:solidFill>
                 <a:latin typeface="Georgia"/>
               </a:rPr>
-              <a:t>Two halves of one gap</a:t>
+              <a:t>A loop, not a tool</a:t>
             </a:r>
           </a:p>
         </p:txBody>
@@ -4249,7 +4281,7 @@
         <p:spPr>
           <a:xfrm>
             <a:off x="822960" y="1737360"/>
-            <a:ext cx="5120640" cy="2377440"/>
+            <a:ext cx="3328416" cy="2468880"/>
           </a:xfrm>
           <a:prstGeom prst="roundRect">
             <a:avLst>
@@ -4296,8 +4328,8 @@
         </p:nvSpPr>
         <p:spPr>
           <a:xfrm>
-            <a:off x="1143000" y="2011680"/>
-            <a:ext cx="4480560" cy="2743200"/>
+            <a:off x="1097280" y="2011680"/>
+            <a:ext cx="2779776" cy="2103120"/>
           </a:xfrm>
           <a:prstGeom prst="rect">
             <a:avLst/>
@@ -4316,13 +4348,13 @@
               </a:lnSpc>
             </a:pPr>
             <a:r>
-              <a:rPr sz="1700" b="1">
+              <a:rPr sz="1550" b="1">
                 <a:solidFill>
                   <a:srgbClr val="B3401F"/>
                 </a:solidFill>
                 <a:latin typeface="Georgia"/>
               </a:rPr>
-              <a:t>1 · Hear yourself as notation</a:t>
+              <a:t>1 · Hear yourself</a:t>
             </a:r>
           </a:p>
           <a:p>
@@ -4348,45 +4380,13 @@
               </a:lnSpc>
             </a:pPr>
             <a:r>
-              <a:rPr sz="1350" b="0">
+              <a:rPr sz="1250" b="0">
                 <a:solidFill>
                   <a:srgbClr val="453F36"/>
                 </a:solidFill>
                 <a:latin typeface="Helvetica Neue"/>
               </a:rPr>
               <a:t>Sing a phrase; get back svaras with sthayi, gamaka and avartana bars, laid out the way the tradition prints it.</a:t>
-            </a:r>
-          </a:p>
-          <a:p>
-            <a:pPr algn="l">
-              <a:lnSpc>
-                <a:spcPct val="130000"/>
-              </a:lnSpc>
-            </a:pPr>
-            <a:r>
-              <a:rPr sz="900" b="0">
-                <a:solidFill>
-                  <a:srgbClr val="756D5E"/>
-                </a:solidFill>
-                <a:latin typeface="Helvetica Neue"/>
-              </a:rPr>
-              <a:t/>
-            </a:r>
-          </a:p>
-          <a:p>
-            <a:pPr algn="l">
-              <a:lnSpc>
-                <a:spcPct val="130000"/>
-              </a:lnSpc>
-            </a:pPr>
-            <a:r>
-              <a:rPr sz="1350" b="0">
-                <a:solidFill>
-                  <a:srgbClr val="453F36"/>
-                </a:solidFill>
-                <a:latin typeface="Helvetica Neue"/>
-              </a:rPr>
-              <a:t>Practise between lessons with something that answers.</a:t>
             </a:r>
           </a:p>
         </p:txBody>
@@ -4399,8 +4399,8 @@
         </p:nvSpPr>
         <p:spPr>
           <a:xfrm>
-            <a:off x="6309360" y="1737360"/>
-            <a:ext cx="5029200" cy="2377440"/>
+            <a:off x="4425696" y="1737360"/>
+            <a:ext cx="3328416" cy="2468880"/>
           </a:xfrm>
           <a:prstGeom prst="roundRect">
             <a:avLst>
@@ -4447,8 +4447,8 @@
         </p:nvSpPr>
         <p:spPr>
           <a:xfrm>
-            <a:off x="6629400" y="2011680"/>
-            <a:ext cx="4389120" cy="2743200"/>
+            <a:off x="4700016" y="2011680"/>
+            <a:ext cx="2779776" cy="2103120"/>
           </a:xfrm>
           <a:prstGeom prst="rect">
             <a:avLst/>
@@ -4467,13 +4467,13 @@
               </a:lnSpc>
             </a:pPr>
             <a:r>
-              <a:rPr sz="1700" b="1">
+              <a:rPr sz="1550" b="1">
                 <a:solidFill>
                   <a:srgbClr val="0E6B5C"/>
                 </a:solidFill>
                 <a:latin typeface="Georgia"/>
               </a:rPr>
-              <a:t>2 · One library, openly licensed</a:t>
+              <a:t>2 · Find it written</a:t>
             </a:r>
           </a:p>
           <a:p>
@@ -4499,7 +4499,7 @@
               </a:lnSpc>
             </a:pPr>
             <a:r>
-              <a:rPr sz="1350" b="0">
+              <a:rPr sz="1250" b="0">
                 <a:solidFill>
                   <a:srgbClr val="453F36"/>
                 </a:solidFill>
@@ -4508,6 +4508,77 @@
               <a:t>Compositions, ragams, talams and notation in one place, searchable, with the source and licence of every row recorded.</a:t>
             </a:r>
           </a:p>
+        </p:txBody>
+      </p:sp>
+      <p:sp>
+        <p:nvSpPr>
+          <p:cNvPr id="8" name="Rounded Rectangle 7"/>
+          <p:cNvSpPr/>
+          <p:nvPr/>
+        </p:nvSpPr>
+        <p:spPr>
+          <a:xfrm>
+            <a:off x="8028431" y="1737360"/>
+            <a:ext cx="3328416" cy="2468880"/>
+          </a:xfrm>
+          <a:prstGeom prst="roundRect">
+            <a:avLst>
+              <a:gd name="adj" fmla="val 6000"/>
+            </a:avLst>
+          </a:prstGeom>
+          <a:solidFill>
+            <a:srgbClr val="FFFFFF"/>
+          </a:solidFill>
+          <a:ln w="12700">
+            <a:solidFill>
+              <a:srgbClr val="E4DCC9"/>
+            </a:solidFill>
+          </a:ln>
+          <a:effectLst/>
+        </p:spPr>
+        <p:style>
+          <a:lnRef idx="1">
+            <a:schemeClr val="accent1"/>
+          </a:lnRef>
+          <a:fillRef idx="3">
+            <a:schemeClr val="accent1"/>
+          </a:fillRef>
+          <a:effectRef idx="2">
+            <a:schemeClr val="accent1"/>
+          </a:effectRef>
+          <a:fontRef idx="minor">
+            <a:schemeClr val="lt1"/>
+          </a:fontRef>
+        </p:style>
+        <p:txBody>
+          <a:bodyPr rtlCol="0" anchor="ctr"/>
+          <a:lstStyle/>
+          <a:p>
+            <a:pPr algn="ctr"/>
+          </a:p>
+        </p:txBody>
+      </p:sp>
+      <p:sp>
+        <p:nvSpPr>
+          <p:cNvPr id="9" name="TextBox 8"/>
+          <p:cNvSpPr txBox="1"/>
+          <p:nvPr/>
+        </p:nvSpPr>
+        <p:spPr>
+          <a:xfrm>
+            <a:off x="8302752" y="2011680"/>
+            <a:ext cx="2779776" cy="2103120"/>
+          </a:xfrm>
+          <a:prstGeom prst="rect">
+            <a:avLst/>
+          </a:prstGeom>
+          <a:noFill/>
+        </p:spPr>
+        <p:txBody>
+          <a:bodyPr wrap="square" anchor="t" lIns="0" rIns="0" tIns="0" bIns="0">
+            <a:spAutoFit/>
+          </a:bodyPr>
+          <a:lstStyle/>
           <a:p>
             <a:pPr algn="l">
               <a:lnSpc>
@@ -4515,6 +4586,22 @@
               </a:lnSpc>
             </a:pPr>
             <a:r>
+              <a:rPr sz="1550" b="1">
+                <a:solidFill>
+                  <a:srgbClr val="8A6D2F"/>
+                </a:solidFill>
+                <a:latin typeface="Georgia"/>
+              </a:rPr>
+              <a:t>3 · Practise against it</a:t>
+            </a:r>
+          </a:p>
+          <a:p>
+            <a:pPr algn="l">
+              <a:lnSpc>
+                <a:spcPct val="130000"/>
+              </a:lnSpc>
+            </a:pPr>
+            <a:r>
               <a:rPr sz="900" b="0">
                 <a:solidFill>
                   <a:srgbClr val="756D5E"/>
@@ -4531,42 +4618,42 @@
               </a:lnSpc>
             </a:pPr>
             <a:r>
-              <a:rPr sz="1350" b="0">
+              <a:rPr sz="1250" b="0">
                 <a:solidFill>
                   <a:srgbClr val="453F36"/>
                 </a:solidFill>
                 <a:latin typeface="Helvetica Neue"/>
               </a:rPr>
-              <a:t>So a reading can be matched against the repertoire.</a:t>
-            </a:r>
-          </a:p>
-        </p:txBody>
-      </p:sp>
-      <p:sp>
-        <p:nvSpPr>
-          <p:cNvPr id="8" name="TextBox 7"/>
-          <p:cNvSpPr txBox="1"/>
-          <p:nvPr/>
-        </p:nvSpPr>
-        <p:spPr>
-          <a:xfrm>
-            <a:off x="822960" y="4434840"/>
-            <a:ext cx="10515600" cy="548640"/>
-          </a:xfrm>
-          <a:prstGeom prst="rect">
-            <a:avLst/>
-          </a:prstGeom>
-          <a:noFill/>
-        </p:spPr>
-        <p:txBody>
-          <a:bodyPr wrap="square" anchor="t" lIns="0" rIns="0" tIns="0" bIns="0">
-            <a:spAutoFit/>
-          </a:bodyPr>
-          <a:lstStyle/>
-          <a:p>
-            <a:pPr algn="l">
-              <a:lnSpc>
-                <a:spcPct val="100000"/>
+              <a:t>Sing a written composition and be told, svara by svara, which you held and which you missed — in cents, not opinion.</a:t>
+            </a:r>
+          </a:p>
+        </p:txBody>
+      </p:sp>
+      <p:sp>
+        <p:nvSpPr>
+          <p:cNvPr id="10" name="TextBox 9"/>
+          <p:cNvSpPr txBox="1"/>
+          <p:nvPr/>
+        </p:nvSpPr>
+        <p:spPr>
+          <a:xfrm>
+            <a:off x="822960" y="4526280"/>
+            <a:ext cx="10515600" cy="731520"/>
+          </a:xfrm>
+          <a:prstGeom prst="rect">
+            <a:avLst/>
+          </a:prstGeom>
+          <a:noFill/>
+        </p:spPr>
+        <p:txBody>
+          <a:bodyPr wrap="square" anchor="t" lIns="0" rIns="0" tIns="0" bIns="0">
+            <a:spAutoFit/>
+          </a:bodyPr>
+          <a:lstStyle/>
+          <a:p>
+            <a:pPr algn="l">
+              <a:lnSpc>
+                <a:spcPct val="125000"/>
               </a:lnSpc>
             </a:pPr>
             <a:r>
@@ -4576,7 +4663,7 @@
                 </a:solidFill>
                 <a:latin typeface="Helvetica Neue"/>
               </a:rPr>
-              <a:t>The two halves feed each other: the library gives the decoder its ragam and tala; the decoder gives the library new readings.</a:t>
+              <a:t>Each stage feeds the next. The library gives the decoder its ragam and tala; the decoder gives the library new readings; the notation gives practice something exact to score against. A student can sing a kriti they cannot yet write, contribute it, and then practise the thing they just wrote.</a:t>
             </a:r>
           </a:p>
         </p:txBody>
@@ -5265,7 +5352,7 @@
                 </a:solidFill>
                 <a:latin typeface="Helvetica Neue"/>
               </a:rPr>
-              <a:t>An AI teacher, optional</a:t>
+              <a:t>Sadhana — guided practice</a:t>
             </a:r>
           </a:p>
         </p:txBody>
@@ -5304,7 +5391,7 @@
                 </a:solidFill>
                 <a:latin typeface="Helvetica Neue"/>
               </a:rPr>
-              <a:t>Reads the transcription and answers questions about it. Never part of producing the transcription.</a:t>
+              <a:t>Sing any notated composition against a scrolling stage with a drone and a tala click; scored per svara in cents.</a:t>
             </a:r>
           </a:p>
         </p:txBody>
@@ -9097,7 +9184,7 @@
                 </a:solidFill>
                 <a:latin typeface="Helvetica Neue"/>
               </a:rPr>
-              <a:t>·  Practice apps with pitch feedback and lesson tracks — Carnatic Singer, Riyaz.</a:t>
+              <a:t>·  Practice apps with pitch feedback and lesson tracks — Riyaz, Carnatic Singer. Sadhana is our answer to these, and they got there first.</a:t>
             </a:r>
           </a:p>
           <a:p>
@@ -9402,6 +9489,38 @@
               </a:lnSpc>
             </a:pPr>
             <a:r>
+              <a:rPr sz="1250" b="0">
+                <a:solidFill>
+                  <a:srgbClr val="453F36"/>
+                </a:solidFill>
+                <a:latin typeface="Helvetica Neue"/>
+              </a:rPr>
+              <a:t>·  Practice scored against an open library rather than a proprietary lesson set — including a 1904 book nobody else can drill you on.</a:t>
+            </a:r>
+          </a:p>
+          <a:p>
+            <a:pPr algn="l">
+              <a:lnSpc>
+                <a:spcPct val="125000"/>
+              </a:lnSpc>
+            </a:pPr>
+            <a:r>
+              <a:rPr sz="600" b="0">
+                <a:solidFill>
+                  <a:srgbClr val="756D5E"/>
+                </a:solidFill>
+                <a:latin typeface="Helvetica Neue"/>
+              </a:rPr>
+              <a:t/>
+            </a:r>
+          </a:p>
+          <a:p>
+            <a:pPr algn="l">
+              <a:lnSpc>
+                <a:spcPct val="125000"/>
+              </a:lnSpc>
+            </a:pPr>
+            <a:r>
               <a:rPr sz="1250" b="1">
                 <a:solidFill>
                   <a:srgbClr val="B3401F"/>
@@ -9421,23 +9540,23 @@
         </p:nvSpPr>
         <p:spPr>
           <a:xfrm>
-            <a:off x="822960" y="5230368"/>
-            <a:ext cx="10515600" cy="548640"/>
-          </a:xfrm>
-          <a:prstGeom prst="rect">
-            <a:avLst/>
-          </a:prstGeom>
-          <a:noFill/>
-        </p:spPr>
-        <p:txBody>
-          <a:bodyPr wrap="square" anchor="t" lIns="0" rIns="0" tIns="0" bIns="0">
-            <a:spAutoFit/>
-          </a:bodyPr>
-          <a:lstStyle/>
-          <a:p>
-            <a:pPr algn="l">
-              <a:lnSpc>
-                <a:spcPct val="100000"/>
+            <a:off x="822960" y="5193792"/>
+            <a:ext cx="10515600" cy="731520"/>
+          </a:xfrm>
+          <a:prstGeom prst="rect">
+            <a:avLst/>
+          </a:prstGeom>
+          <a:noFill/>
+        </p:spPr>
+        <p:txBody>
+          <a:bodyPr wrap="square" anchor="t" lIns="0" rIns="0" tIns="0" bIns="0">
+            <a:spAutoFit/>
+          </a:bodyPr>
+          <a:lstStyle/>
+          <a:p>
+            <a:pPr algn="l">
+              <a:lnSpc>
+                <a:spcPct val="125000"/>
               </a:lnSpc>
             </a:pPr>
             <a:r>
@@ -9447,7 +9566,7 @@
                 </a:solidFill>
                 <a:latin typeface="Helvetica Neue"/>
               </a:rPr>
-              <a:t>Honest reading: the transcription feature is differentiated, not unique. The extracted SSP corpus is the genuinely novel contribution.</a:t>
+              <a:t>Honest reading: transcription is differentiated, not unique, and practice apps had a decade’s head start. What none of them close is the loop — sing something down, contribute it, then be drilled on it. The extracted SSP corpus is what makes that loop worth closing.</a:t>
             </a:r>
           </a:p>
         </p:txBody>

--- a/SruthiScribe-pitch.pptx
+++ b/SruthiScribe-pitch.pptx
@@ -4281,7 +4281,7 @@
         <p:spPr>
           <a:xfrm>
             <a:off x="822960" y="1737360"/>
-            <a:ext cx="3328416" cy="2468880"/>
+            <a:ext cx="3328416" cy="2148840"/>
           </a:xfrm>
           <a:prstGeom prst="roundRect">
             <a:avLst>
@@ -4329,7 +4329,7 @@
         <p:spPr>
           <a:xfrm>
             <a:off x="1097280" y="2011680"/>
-            <a:ext cx="2779776" cy="2103120"/>
+            <a:ext cx="2779776" cy="1828800"/>
           </a:xfrm>
           <a:prstGeom prst="rect">
             <a:avLst/>
@@ -4400,7 +4400,7 @@
         <p:spPr>
           <a:xfrm>
             <a:off x="4425696" y="1737360"/>
-            <a:ext cx="3328416" cy="2468880"/>
+            <a:ext cx="3328416" cy="2148840"/>
           </a:xfrm>
           <a:prstGeom prst="roundRect">
             <a:avLst>
@@ -4448,7 +4448,7 @@
         <p:spPr>
           <a:xfrm>
             <a:off x="4700016" y="2011680"/>
-            <a:ext cx="2779776" cy="2103120"/>
+            <a:ext cx="2779776" cy="1828800"/>
           </a:xfrm>
           <a:prstGeom prst="rect">
             <a:avLst/>
@@ -4519,7 +4519,7 @@
         <p:spPr>
           <a:xfrm>
             <a:off x="8028431" y="1737360"/>
-            <a:ext cx="3328416" cy="2468880"/>
+            <a:ext cx="3328416" cy="2148840"/>
           </a:xfrm>
           <a:prstGeom prst="roundRect">
             <a:avLst>
@@ -4567,7 +4567,7 @@
         <p:spPr>
           <a:xfrm>
             <a:off x="8302752" y="2011680"/>
-            <a:ext cx="2779776" cy="2103120"/>
+            <a:ext cx="2779776" cy="1828800"/>
           </a:xfrm>
           <a:prstGeom prst="rect">
             <a:avLst/>
@@ -4637,8 +4637,8 @@
         </p:nvSpPr>
         <p:spPr>
           <a:xfrm>
-            <a:off x="822960" y="4526280"/>
-            <a:ext cx="10515600" cy="731520"/>
+            <a:off x="822960" y="4206240"/>
+            <a:ext cx="10515600" cy="822960"/>
           </a:xfrm>
           <a:prstGeom prst="rect">
             <a:avLst/>
@@ -9047,7 +9047,7 @@
         <p:spPr>
           <a:xfrm>
             <a:off x="822960" y="1691640"/>
-            <a:ext cx="5120640" cy="3291840"/>
+            <a:ext cx="5120640" cy="3794760"/>
           </a:xfrm>
           <a:prstGeom prst="roundRect">
             <a:avLst>
@@ -9095,7 +9095,7 @@
         <p:spPr>
           <a:xfrm>
             <a:off x="1143000" y="1965960"/>
-            <a:ext cx="4480560" cy="2926080"/>
+            <a:ext cx="4480560" cy="3429000"/>
           </a:xfrm>
           <a:prstGeom prst="rect">
             <a:avLst/>
@@ -9294,7 +9294,7 @@
         <p:spPr>
           <a:xfrm>
             <a:off x="6309360" y="1691640"/>
-            <a:ext cx="5029200" cy="3291840"/>
+            <a:ext cx="5029200" cy="3794760"/>
           </a:xfrm>
           <a:prstGeom prst="roundRect">
             <a:avLst>
@@ -9342,7 +9342,7 @@
         <p:spPr>
           <a:xfrm>
             <a:off x="6629400" y="1965960"/>
-            <a:ext cx="4389120" cy="2926080"/>
+            <a:ext cx="4389120" cy="3429000"/>
           </a:xfrm>
           <a:prstGeom prst="rect">
             <a:avLst/>
@@ -9540,8 +9540,8 @@
         </p:nvSpPr>
         <p:spPr>
           <a:xfrm>
-            <a:off x="822960" y="5193792"/>
-            <a:ext cx="10515600" cy="731520"/>
+            <a:off x="822960" y="5650992"/>
+            <a:ext cx="10515600" cy="822960"/>
           </a:xfrm>
           <a:prstGeom prst="rect">
             <a:avLst/>
